--- a/PPT/Rohan-papers.pptx
+++ b/PPT/Rohan-papers.pptx
@@ -138,7 +138,7 @@
       </p:grpSpPr>
       <p:sp>
         <p:nvSpPr>
-          <p:cNvPr id="637003019" name="Header Placeholder 1"/>
+          <p:cNvPr id="1759216188" name="Header Placeholder 1"/>
           <p:cNvSpPr>
             <a:spLocks noGrp="1"/>
           </p:cNvSpPr>
@@ -172,7 +172,7 @@
       </p:sp>
       <p:sp>
         <p:nvSpPr>
-          <p:cNvPr id="1315971082" name="Date Placeholder 2"/>
+          <p:cNvPr id="211069005" name="Date Placeholder 2"/>
           <p:cNvSpPr>
             <a:spLocks noGrp="1"/>
           </p:cNvSpPr>
@@ -210,7 +210,7 @@
       </p:sp>
       <p:sp>
         <p:nvSpPr>
-          <p:cNvPr id="946378757" name="Slide Image Placeholder 3"/>
+          <p:cNvPr id="1047053253" name="Slide Image Placeholder 3"/>
           <p:cNvSpPr>
             <a:spLocks noChangeAspect="1" noGrp="1" noRot="1"/>
           </p:cNvSpPr>
@@ -246,7 +246,7 @@
       </p:sp>
       <p:sp>
         <p:nvSpPr>
-          <p:cNvPr id="1105492728" name="Notes Placeholder 4"/>
+          <p:cNvPr id="39894880" name="Notes Placeholder 4"/>
           <p:cNvSpPr>
             <a:spLocks noGrp="1"/>
           </p:cNvSpPr>
@@ -320,7 +320,7 @@
       </p:sp>
       <p:sp>
         <p:nvSpPr>
-          <p:cNvPr id="1718022552" name="Footer Placeholder 5"/>
+          <p:cNvPr id="1012292948" name="Footer Placeholder 5"/>
           <p:cNvSpPr>
             <a:spLocks noGrp="1"/>
           </p:cNvSpPr>
@@ -354,7 +354,7 @@
       </p:sp>
       <p:sp>
         <p:nvSpPr>
-          <p:cNvPr id="873691101" name="Slide Number Placeholder 6"/>
+          <p:cNvPr id="1646056989" name="Slide Number Placeholder 6"/>
           <p:cNvSpPr>
             <a:spLocks noGrp="1"/>
           </p:cNvSpPr>
@@ -507,7 +507,7 @@
       </p:grpSpPr>
       <p:sp>
         <p:nvSpPr>
-          <p:cNvPr id="2" name="Slide Image Placeholder 1"/>
+          <p:cNvPr id="1917891933" name="Slide Image Placeholder 1"/>
           <p:cNvSpPr>
             <a:spLocks noChangeAspect="1" noGrp="1" noRot="1"/>
           </p:cNvSpPr>
@@ -519,7 +519,7 @@
       </p:sp>
       <p:sp>
         <p:nvSpPr>
-          <p:cNvPr id="3" name="Notes Placeholder 2"/>
+          <p:cNvPr id="1772998699" name="Notes Placeholder 2"/>
           <p:cNvSpPr>
             <a:spLocks noGrp="1"/>
           </p:cNvSpPr>
@@ -541,7 +541,7 @@
       </p:sp>
       <p:sp>
         <p:nvSpPr>
-          <p:cNvPr id="4" name="Slide Number Placeholder 3"/>
+          <p:cNvPr id="73330463" name="Slide Number Placeholder 3"/>
           <p:cNvSpPr>
             <a:spLocks noGrp="1"/>
           </p:cNvSpPr>
@@ -557,7 +557,7 @@
             <a:pPr>
               <a:defRPr/>
             </a:pPr>
-            <a:fld id="{ACBF6FB4-B784-E43E-7F5C-A1820B0ABDCC}" type="slidenum">
+            <a:fld id="{3B6F5227-C244-1C6F-D850-E30190148386}" type="slidenum">
               <a:rPr/>
               <a:t/>
             </a:fld>
@@ -592,7 +592,7 @@
       </p:grpSpPr>
       <p:sp>
         <p:nvSpPr>
-          <p:cNvPr id="757156219" name="Slide Image Placeholder 1"/>
+          <p:cNvPr id="11255164" name="Slide Image Placeholder 1"/>
           <p:cNvSpPr>
             <a:spLocks noChangeAspect="1" noGrp="1" noRot="1"/>
           </p:cNvSpPr>
@@ -604,7 +604,7 @@
       </p:sp>
       <p:sp>
         <p:nvSpPr>
-          <p:cNvPr id="167403570" name="Notes Placeholder 2"/>
+          <p:cNvPr id="1786775638" name="Notes Placeholder 2"/>
           <p:cNvSpPr>
             <a:spLocks noGrp="1"/>
           </p:cNvSpPr>
@@ -626,7 +626,7 @@
       </p:sp>
       <p:sp>
         <p:nvSpPr>
-          <p:cNvPr id="1442067907" name="Slide Number Placeholder 3"/>
+          <p:cNvPr id="1499761836" name="Slide Number Placeholder 3"/>
           <p:cNvSpPr>
             <a:spLocks noGrp="1"/>
           </p:cNvSpPr>
@@ -642,7 +642,7 @@
             <a:pPr>
               <a:defRPr/>
             </a:pPr>
-            <a:fld id="{3B6F5227-C244-1C6F-D850-E30190148386}" type="slidenum">
+            <a:fld id="{ACBF6FB4-B784-E43E-7F5C-A1820B0ABDCC}" type="slidenum">
               <a:rPr/>
               <a:t/>
             </a:fld>
@@ -677,7 +677,7 @@
       </p:grpSpPr>
       <p:sp>
         <p:nvSpPr>
-          <p:cNvPr id="2" name="Slide Image Placeholder 1"/>
+          <p:cNvPr id="2110632428" name="Slide Image Placeholder 1"/>
           <p:cNvSpPr>
             <a:spLocks noChangeAspect="1" noGrp="1" noRot="1"/>
           </p:cNvSpPr>
@@ -689,7 +689,7 @@
       </p:sp>
       <p:sp>
         <p:nvSpPr>
-          <p:cNvPr id="3" name="Notes Placeholder 2"/>
+          <p:cNvPr id="988949349" name="Notes Placeholder 2"/>
           <p:cNvSpPr>
             <a:spLocks noGrp="1"/>
           </p:cNvSpPr>
@@ -711,7 +711,7 @@
       </p:sp>
       <p:sp>
         <p:nvSpPr>
-          <p:cNvPr id="4" name="Slide Number Placeholder 3"/>
+          <p:cNvPr id="887387785" name="Slide Number Placeholder 3"/>
           <p:cNvSpPr>
             <a:spLocks noGrp="1"/>
           </p:cNvSpPr>
@@ -762,7 +762,7 @@
       </p:grpSpPr>
       <p:sp>
         <p:nvSpPr>
-          <p:cNvPr id="2" name="Slide Image Placeholder 1"/>
+          <p:cNvPr id="1941398679" name="Slide Image Placeholder 1"/>
           <p:cNvSpPr>
             <a:spLocks noChangeAspect="1" noGrp="1" noRot="1"/>
           </p:cNvSpPr>
@@ -774,7 +774,7 @@
       </p:sp>
       <p:sp>
         <p:nvSpPr>
-          <p:cNvPr id="3" name="Notes Placeholder 2"/>
+          <p:cNvPr id="313206965" name="Notes Placeholder 2"/>
           <p:cNvSpPr>
             <a:spLocks noGrp="1"/>
           </p:cNvSpPr>
@@ -796,7 +796,7 @@
       </p:sp>
       <p:sp>
         <p:nvSpPr>
-          <p:cNvPr id="4" name="Slide Number Placeholder 3"/>
+          <p:cNvPr id="1012034590" name="Slide Number Placeholder 3"/>
           <p:cNvSpPr>
             <a:spLocks noGrp="1"/>
           </p:cNvSpPr>
@@ -847,7 +847,7 @@
       </p:grpSpPr>
       <p:sp>
         <p:nvSpPr>
-          <p:cNvPr id="2" name="Slide Image Placeholder 1"/>
+          <p:cNvPr id="884929781" name="Slide Image Placeholder 1"/>
           <p:cNvSpPr>
             <a:spLocks noChangeAspect="1" noGrp="1" noRot="1"/>
           </p:cNvSpPr>
@@ -859,7 +859,7 @@
       </p:sp>
       <p:sp>
         <p:nvSpPr>
-          <p:cNvPr id="3" name="Notes Placeholder 2"/>
+          <p:cNvPr id="795904540" name="Notes Placeholder 2"/>
           <p:cNvSpPr>
             <a:spLocks noGrp="1"/>
           </p:cNvSpPr>
@@ -881,7 +881,7 @@
       </p:sp>
       <p:sp>
         <p:nvSpPr>
-          <p:cNvPr id="4" name="Slide Number Placeholder 3"/>
+          <p:cNvPr id="272744489" name="Slide Number Placeholder 3"/>
           <p:cNvSpPr>
             <a:spLocks noGrp="1"/>
           </p:cNvSpPr>
@@ -932,7 +932,7 @@
       </p:grpSpPr>
       <p:grpSp>
         <p:nvGrpSpPr>
-          <p:cNvPr id="1472516648" name="Group 24"/>
+          <p:cNvPr id="1188719536" name="Group 24"/>
           <p:cNvGrpSpPr/>
           <p:nvPr/>
         </p:nvGrpSpPr>
@@ -1254,7 +1254,7 @@
       </p:grpSp>
       <p:sp>
         <p:nvSpPr>
-          <p:cNvPr id="831226798" name="Title 1"/>
+          <p:cNvPr id="147258799" name="Title 1"/>
           <p:cNvSpPr>
             <a:spLocks noGrp="1"/>
           </p:cNvSpPr>
@@ -1291,7 +1291,7 @@
       </p:sp>
       <p:sp>
         <p:nvSpPr>
-          <p:cNvPr id="665529696" name="Subtitle 2"/>
+          <p:cNvPr id="394473813" name="Subtitle 2"/>
           <p:cNvSpPr>
             <a:spLocks noGrp="1"/>
           </p:cNvSpPr>
@@ -1413,7 +1413,7 @@
       </p:sp>
       <p:sp>
         <p:nvSpPr>
-          <p:cNvPr id="1034995585" name="Date Placeholder 3"/>
+          <p:cNvPr id="1264464619" name="Date Placeholder 3"/>
           <p:cNvSpPr>
             <a:spLocks noGrp="1"/>
           </p:cNvSpPr>
@@ -1423,7 +1423,7 @@
         </p:nvSpPr>
         <p:spPr bwMode="auto">
           <a:xfrm>
-            <a:off x="9767697" y="6117336"/>
+            <a:off x="9767696" y="6117336"/>
             <a:ext cx="1143297" cy="365124"/>
           </a:xfrm>
         </p:spPr>
@@ -1440,7 +1440,7 @@
       </p:sp>
       <p:sp>
         <p:nvSpPr>
-          <p:cNvPr id="516783258" name="Footer Placeholder 4"/>
+          <p:cNvPr id="160833984" name="Footer Placeholder 4"/>
           <p:cNvSpPr>
             <a:spLocks noGrp="1"/>
           </p:cNvSpPr>
@@ -1467,7 +1467,7 @@
       </p:sp>
       <p:sp>
         <p:nvSpPr>
-          <p:cNvPr id="630537294" name="Slide Number Placeholder 5"/>
+          <p:cNvPr id="869866679" name="Slide Number Placeholder 5"/>
           <p:cNvSpPr>
             <a:spLocks noGrp="1"/>
           </p:cNvSpPr>
@@ -1505,7 +1505,7 @@
       </p:sp>
       <p:sp>
         <p:nvSpPr>
-          <p:cNvPr id="1888159669" name="Freeform 12"/>
+          <p:cNvPr id="588694408" name="Freeform 12"/>
           <p:cNvSpPr/>
           <p:nvPr/>
         </p:nvSpPr>
@@ -1548,7 +1548,7 @@
       </p:sp>
       <p:sp>
         <p:nvSpPr>
-          <p:cNvPr id="839203681" name="Freeform 13"/>
+          <p:cNvPr id="1833514142" name="Freeform 13"/>
           <p:cNvSpPr/>
           <p:nvPr/>
         </p:nvSpPr>
@@ -1616,7 +1616,7 @@
       </p:grpSpPr>
       <p:sp>
         <p:nvSpPr>
-          <p:cNvPr id="1904547033" name="Title 1"/>
+          <p:cNvPr id="995301965" name="Title 1"/>
           <p:cNvSpPr>
             <a:spLocks noGrp="1"/>
           </p:cNvSpPr>
@@ -1627,7 +1627,7 @@
         <p:spPr bwMode="auto">
           <a:xfrm>
             <a:off x="1484697" y="4732864"/>
-            <a:ext cx="10021321" cy="566737"/>
+            <a:ext cx="10021320" cy="566737"/>
           </a:xfrm>
         </p:spPr>
         <p:txBody>
@@ -1653,7 +1653,7 @@
       </p:sp>
       <p:sp>
         <p:nvSpPr>
-          <p:cNvPr id="468901300" name="Picture Placeholder 2"/>
+          <p:cNvPr id="347504246" name="Picture Placeholder 2"/>
           <p:cNvSpPr>
             <a:spLocks noChangeAspect="1" noGrp="1"/>
           </p:cNvSpPr>
@@ -1750,7 +1750,7 @@
       </p:sp>
       <p:sp>
         <p:nvSpPr>
-          <p:cNvPr id="602821015" name="Text Placeholder 3"/>
+          <p:cNvPr id="659969526" name="Text Placeholder 3"/>
           <p:cNvSpPr>
             <a:spLocks noGrp="1"/>
           </p:cNvSpPr>
@@ -1761,7 +1761,7 @@
         <p:spPr bwMode="auto">
           <a:xfrm>
             <a:off x="1484697" y="5299601"/>
-            <a:ext cx="10021321" cy="493711"/>
+            <a:ext cx="10021320" cy="493711"/>
           </a:xfrm>
         </p:spPr>
         <p:txBody>
@@ -1820,7 +1820,7 @@
       </p:sp>
       <p:sp>
         <p:nvSpPr>
-          <p:cNvPr id="1294142095" name="Date Placeholder 4"/>
+          <p:cNvPr id="798317329" name="Date Placeholder 4"/>
           <p:cNvSpPr>
             <a:spLocks noGrp="1"/>
           </p:cNvSpPr>
@@ -1842,7 +1842,7 @@
       </p:sp>
       <p:sp>
         <p:nvSpPr>
-          <p:cNvPr id="291964254" name="Footer Placeholder 5"/>
+          <p:cNvPr id="2130326235" name="Footer Placeholder 5"/>
           <p:cNvSpPr>
             <a:spLocks noGrp="1"/>
           </p:cNvSpPr>
@@ -1864,7 +1864,7 @@
       </p:sp>
       <p:sp>
         <p:nvSpPr>
-          <p:cNvPr id="1444249874" name="Slide Number Placeholder 6"/>
+          <p:cNvPr id="990247052" name="Slide Number Placeholder 6"/>
           <p:cNvSpPr>
             <a:spLocks noGrp="1"/>
           </p:cNvSpPr>
@@ -1922,7 +1922,7 @@
       </p:grpSpPr>
       <p:sp>
         <p:nvSpPr>
-          <p:cNvPr id="1529950446" name="Title 1"/>
+          <p:cNvPr id="199557249" name="Title 1"/>
           <p:cNvSpPr>
             <a:spLocks noGrp="1"/>
           </p:cNvSpPr>
@@ -1933,7 +1933,7 @@
         <p:spPr bwMode="auto">
           <a:xfrm>
             <a:off x="1484698" y="685800"/>
-            <a:ext cx="10021321" cy="3047999"/>
+            <a:ext cx="10021320" cy="3047999"/>
           </a:xfrm>
         </p:spPr>
         <p:txBody>
@@ -1959,7 +1959,7 @@
       </p:sp>
       <p:sp>
         <p:nvSpPr>
-          <p:cNvPr id="205574217" name="Text Placeholder 2"/>
+          <p:cNvPr id="51819271" name="Text Placeholder 2"/>
           <p:cNvSpPr>
             <a:spLocks noGrp="1"/>
           </p:cNvSpPr>
@@ -2081,7 +2081,7 @@
       </p:sp>
       <p:sp>
         <p:nvSpPr>
-          <p:cNvPr id="1171885662" name="Date Placeholder 3"/>
+          <p:cNvPr id="1028701282" name="Date Placeholder 3"/>
           <p:cNvSpPr>
             <a:spLocks noGrp="1"/>
           </p:cNvSpPr>
@@ -2103,7 +2103,7 @@
       </p:sp>
       <p:sp>
         <p:nvSpPr>
-          <p:cNvPr id="1800335921" name="Footer Placeholder 4"/>
+          <p:cNvPr id="1842497187" name="Footer Placeholder 4"/>
           <p:cNvSpPr>
             <a:spLocks noGrp="1"/>
           </p:cNvSpPr>
@@ -2125,7 +2125,7 @@
       </p:sp>
       <p:sp>
         <p:nvSpPr>
-          <p:cNvPr id="1207433999" name="Slide Number Placeholder 5"/>
+          <p:cNvPr id="533889612" name="Slide Number Placeholder 5"/>
           <p:cNvSpPr>
             <a:spLocks noGrp="1"/>
           </p:cNvSpPr>
@@ -2183,7 +2183,7 @@
       </p:grpSpPr>
       <p:sp>
         <p:nvSpPr>
-          <p:cNvPr id="701782741" name="TextBox 13"/>
+          <p:cNvPr id="1747815943" name="TextBox 13"/>
           <p:cNvSpPr txBox="1"/>
           <p:nvPr/>
         </p:nvSpPr>
@@ -2287,7 +2287,7 @@
       </p:sp>
       <p:sp>
         <p:nvSpPr>
-          <p:cNvPr id="828005608" name="TextBox 14"/>
+          <p:cNvPr id="502125009" name="TextBox 14"/>
           <p:cNvSpPr txBox="1"/>
           <p:nvPr/>
         </p:nvSpPr>
@@ -2391,7 +2391,7 @@
       </p:sp>
       <p:sp>
         <p:nvSpPr>
-          <p:cNvPr id="238198387" name="Title 1"/>
+          <p:cNvPr id="420555689" name="Title 1"/>
           <p:cNvSpPr>
             <a:spLocks noGrp="1"/>
           </p:cNvSpPr>
@@ -2432,7 +2432,7 @@
       </p:sp>
       <p:sp>
         <p:nvSpPr>
-          <p:cNvPr id="692918290" name="Text Placeholder 9"/>
+          <p:cNvPr id="1320927780" name="Text Placeholder 9"/>
           <p:cNvSpPr>
             <a:spLocks noGrp="1"/>
           </p:cNvSpPr>
@@ -2442,7 +2442,7 @@
         </p:nvSpPr>
         <p:spPr bwMode="auto">
           <a:xfrm>
-            <a:off x="2130979" y="3428998"/>
+            <a:off x="2130979" y="3428997"/>
             <a:ext cx="8841503" cy="380999"/>
           </a:xfrm>
         </p:spPr>
@@ -2491,7 +2491,7 @@
       </p:sp>
       <p:sp>
         <p:nvSpPr>
-          <p:cNvPr id="762312822" name="Text Placeholder 2"/>
+          <p:cNvPr id="419166515" name="Text Placeholder 2"/>
           <p:cNvSpPr>
             <a:spLocks noGrp="1"/>
           </p:cNvSpPr>
@@ -2502,7 +2502,7 @@
         <p:spPr bwMode="auto">
           <a:xfrm>
             <a:off x="1484697" y="4343400"/>
-            <a:ext cx="10021321" cy="1447799"/>
+            <a:ext cx="10021320" cy="1447799"/>
           </a:xfrm>
         </p:spPr>
         <p:txBody>
@@ -2613,7 +2613,7 @@
       </p:sp>
       <p:sp>
         <p:nvSpPr>
-          <p:cNvPr id="361110417" name="Date Placeholder 3"/>
+          <p:cNvPr id="912668204" name="Date Placeholder 3"/>
           <p:cNvSpPr>
             <a:spLocks noGrp="1"/>
           </p:cNvSpPr>
@@ -2635,7 +2635,7 @@
       </p:sp>
       <p:sp>
         <p:nvSpPr>
-          <p:cNvPr id="1845936912" name="Footer Placeholder 4"/>
+          <p:cNvPr id="2058677817" name="Footer Placeholder 4"/>
           <p:cNvSpPr>
             <a:spLocks noGrp="1"/>
           </p:cNvSpPr>
@@ -2657,7 +2657,7 @@
       </p:sp>
       <p:sp>
         <p:nvSpPr>
-          <p:cNvPr id="1093284197" name="Slide Number Placeholder 5"/>
+          <p:cNvPr id="1778435977" name="Slide Number Placeholder 5"/>
           <p:cNvSpPr>
             <a:spLocks noGrp="1"/>
           </p:cNvSpPr>
@@ -2715,7 +2715,7 @@
       </p:grpSpPr>
       <p:sp>
         <p:nvSpPr>
-          <p:cNvPr id="606148672" name="Title 1"/>
+          <p:cNvPr id="1725793055" name="Title 1"/>
           <p:cNvSpPr>
             <a:spLocks noGrp="1"/>
           </p:cNvSpPr>
@@ -2752,7 +2752,7 @@
       </p:sp>
       <p:sp>
         <p:nvSpPr>
-          <p:cNvPr id="1561682473" name="Text Placeholder 2"/>
+          <p:cNvPr id="2117262758" name="Text Placeholder 2"/>
           <p:cNvSpPr>
             <a:spLocks noGrp="1"/>
           </p:cNvSpPr>
@@ -2874,7 +2874,7 @@
       </p:sp>
       <p:sp>
         <p:nvSpPr>
-          <p:cNvPr id="1096607589" name="Date Placeholder 3"/>
+          <p:cNvPr id="1763449185" name="Date Placeholder 3"/>
           <p:cNvSpPr>
             <a:spLocks noGrp="1"/>
           </p:cNvSpPr>
@@ -2896,7 +2896,7 @@
       </p:sp>
       <p:sp>
         <p:nvSpPr>
-          <p:cNvPr id="533036199" name="Footer Placeholder 4"/>
+          <p:cNvPr id="1594659106" name="Footer Placeholder 4"/>
           <p:cNvSpPr>
             <a:spLocks noGrp="1"/>
           </p:cNvSpPr>
@@ -2918,7 +2918,7 @@
       </p:sp>
       <p:sp>
         <p:nvSpPr>
-          <p:cNvPr id="1657639450" name="Slide Number Placeholder 5"/>
+          <p:cNvPr id="1408081956" name="Slide Number Placeholder 5"/>
           <p:cNvSpPr>
             <a:spLocks noGrp="1"/>
           </p:cNvSpPr>
@@ -2976,7 +2976,7 @@
       </p:grpSpPr>
       <p:sp>
         <p:nvSpPr>
-          <p:cNvPr id="1914913987" name="TextBox 13"/>
+          <p:cNvPr id="561407094" name="TextBox 13"/>
           <p:cNvSpPr txBox="1"/>
           <p:nvPr/>
         </p:nvSpPr>
@@ -3080,7 +3080,7 @@
       </p:sp>
       <p:sp>
         <p:nvSpPr>
-          <p:cNvPr id="1991939157" name="TextBox 14"/>
+          <p:cNvPr id="1090738077" name="TextBox 14"/>
           <p:cNvSpPr txBox="1"/>
           <p:nvPr/>
         </p:nvSpPr>
@@ -3184,7 +3184,7 @@
       </p:sp>
       <p:sp>
         <p:nvSpPr>
-          <p:cNvPr id="1853623994" name="Title 1"/>
+          <p:cNvPr id="326213733" name="Title 1"/>
           <p:cNvSpPr>
             <a:spLocks noGrp="1"/>
           </p:cNvSpPr>
@@ -3225,7 +3225,7 @@
       </p:sp>
       <p:sp>
         <p:nvSpPr>
-          <p:cNvPr id="1333958666" name="Text Placeholder 9"/>
+          <p:cNvPr id="472436175" name="Text Placeholder 9"/>
           <p:cNvSpPr>
             <a:spLocks noGrp="1"/>
           </p:cNvSpPr>
@@ -3274,7 +3274,7 @@
       </p:sp>
       <p:sp>
         <p:nvSpPr>
-          <p:cNvPr id="704753146" name="Text Placeholder 2"/>
+          <p:cNvPr id="107962215" name="Text Placeholder 2"/>
           <p:cNvSpPr>
             <a:spLocks noGrp="1"/>
           </p:cNvSpPr>
@@ -3396,7 +3396,7 @@
       </p:sp>
       <p:sp>
         <p:nvSpPr>
-          <p:cNvPr id="576105931" name="Date Placeholder 3"/>
+          <p:cNvPr id="564214941" name="Date Placeholder 3"/>
           <p:cNvSpPr>
             <a:spLocks noGrp="1"/>
           </p:cNvSpPr>
@@ -3418,7 +3418,7 @@
       </p:sp>
       <p:sp>
         <p:nvSpPr>
-          <p:cNvPr id="1128605233" name="Footer Placeholder 4"/>
+          <p:cNvPr id="648068242" name="Footer Placeholder 4"/>
           <p:cNvSpPr>
             <a:spLocks noGrp="1"/>
           </p:cNvSpPr>
@@ -3440,7 +3440,7 @@
       </p:sp>
       <p:sp>
         <p:nvSpPr>
-          <p:cNvPr id="1538499828" name="Slide Number Placeholder 5"/>
+          <p:cNvPr id="474327156" name="Slide Number Placeholder 5"/>
           <p:cNvSpPr>
             <a:spLocks noGrp="1"/>
           </p:cNvSpPr>
@@ -3498,7 +3498,7 @@
       </p:grpSpPr>
       <p:sp>
         <p:nvSpPr>
-          <p:cNvPr id="1971451456" name="Title 1"/>
+          <p:cNvPr id="48064385" name="Title 1"/>
           <p:cNvSpPr>
             <a:spLocks noGrp="1"/>
           </p:cNvSpPr>
@@ -3509,7 +3509,7 @@
         <p:spPr bwMode="auto">
           <a:xfrm>
             <a:off x="1484699" y="685800"/>
-            <a:ext cx="10021321" cy="2727324"/>
+            <a:ext cx="10021320" cy="2727324"/>
           </a:xfrm>
         </p:spPr>
         <p:txBody>
@@ -3535,7 +3535,7 @@
       </p:sp>
       <p:sp>
         <p:nvSpPr>
-          <p:cNvPr id="848515295" name="Text Placeholder 9"/>
+          <p:cNvPr id="1449437412" name="Text Placeholder 9"/>
           <p:cNvSpPr>
             <a:spLocks noGrp="1"/>
           </p:cNvSpPr>
@@ -3546,7 +3546,7 @@
         <p:spPr bwMode="auto">
           <a:xfrm>
             <a:off x="1484698" y="3505198"/>
-            <a:ext cx="10021322" cy="838199"/>
+            <a:ext cx="10021322" cy="838198"/>
           </a:xfrm>
         </p:spPr>
         <p:txBody>
@@ -3584,7 +3584,7 @@
       </p:sp>
       <p:sp>
         <p:nvSpPr>
-          <p:cNvPr id="18141648" name="Text Placeholder 2"/>
+          <p:cNvPr id="1122766594" name="Text Placeholder 2"/>
           <p:cNvSpPr>
             <a:spLocks noGrp="1"/>
           </p:cNvSpPr>
@@ -3706,7 +3706,7 @@
       </p:sp>
       <p:sp>
         <p:nvSpPr>
-          <p:cNvPr id="1725901322" name="Date Placeholder 3"/>
+          <p:cNvPr id="1368848852" name="Date Placeholder 3"/>
           <p:cNvSpPr>
             <a:spLocks noGrp="1"/>
           </p:cNvSpPr>
@@ -3728,7 +3728,7 @@
       </p:sp>
       <p:sp>
         <p:nvSpPr>
-          <p:cNvPr id="387719491" name="Footer Placeholder 4"/>
+          <p:cNvPr id="618484017" name="Footer Placeholder 4"/>
           <p:cNvSpPr>
             <a:spLocks noGrp="1"/>
           </p:cNvSpPr>
@@ -3750,7 +3750,7 @@
       </p:sp>
       <p:sp>
         <p:nvSpPr>
-          <p:cNvPr id="136039623" name="Slide Number Placeholder 5"/>
+          <p:cNvPr id="1269613013" name="Slide Number Placeholder 5"/>
           <p:cNvSpPr>
             <a:spLocks noGrp="1"/>
           </p:cNvSpPr>
@@ -3808,7 +3808,7 @@
       </p:grpSpPr>
       <p:sp>
         <p:nvSpPr>
-          <p:cNvPr id="491909338" name="Title 1"/>
+          <p:cNvPr id="1483920719" name="Title 1"/>
           <p:cNvSpPr>
             <a:spLocks noGrp="1"/>
           </p:cNvSpPr>
@@ -3838,7 +3838,7 @@
       </p:sp>
       <p:sp>
         <p:nvSpPr>
-          <p:cNvPr id="244933704" name="Vertical Text Placeholder 2"/>
+          <p:cNvPr id="6224160" name="Vertical Text Placeholder 2"/>
           <p:cNvSpPr>
             <a:spLocks noGrp="1"/>
           </p:cNvSpPr>
@@ -3904,7 +3904,7 @@
       </p:sp>
       <p:sp>
         <p:nvSpPr>
-          <p:cNvPr id="1306683303" name="Date Placeholder 3"/>
+          <p:cNvPr id="1626902999" name="Date Placeholder 3"/>
           <p:cNvSpPr>
             <a:spLocks noGrp="1"/>
           </p:cNvSpPr>
@@ -3926,7 +3926,7 @@
       </p:sp>
       <p:sp>
         <p:nvSpPr>
-          <p:cNvPr id="891373814" name="Footer Placeholder 4"/>
+          <p:cNvPr id="1957124274" name="Footer Placeholder 4"/>
           <p:cNvSpPr>
             <a:spLocks noGrp="1"/>
           </p:cNvSpPr>
@@ -3948,7 +3948,7 @@
       </p:sp>
       <p:sp>
         <p:nvSpPr>
-          <p:cNvPr id="1955691342" name="Slide Number Placeholder 5"/>
+          <p:cNvPr id="926579285" name="Slide Number Placeholder 5"/>
           <p:cNvSpPr>
             <a:spLocks noGrp="1"/>
           </p:cNvSpPr>
@@ -4006,7 +4006,7 @@
       </p:grpSpPr>
       <p:sp>
         <p:nvSpPr>
-          <p:cNvPr id="664595166" name="Vertical Title 1"/>
+          <p:cNvPr id="665260803" name="Vertical Title 1"/>
           <p:cNvSpPr>
             <a:spLocks noGrp="1"/>
           </p:cNvSpPr>
@@ -4037,7 +4037,7 @@
       </p:sp>
       <p:sp>
         <p:nvSpPr>
-          <p:cNvPr id="2058216019" name="Vertical Text Placeholder 2"/>
+          <p:cNvPr id="1478201805" name="Vertical Text Placeholder 2"/>
           <p:cNvSpPr>
             <a:spLocks noGrp="1"/>
           </p:cNvSpPr>
@@ -4108,7 +4108,7 @@
       </p:sp>
       <p:sp>
         <p:nvSpPr>
-          <p:cNvPr id="405961698" name="Date Placeholder 3"/>
+          <p:cNvPr id="23836833" name="Date Placeholder 3"/>
           <p:cNvSpPr>
             <a:spLocks noGrp="1"/>
           </p:cNvSpPr>
@@ -4130,7 +4130,7 @@
       </p:sp>
       <p:sp>
         <p:nvSpPr>
-          <p:cNvPr id="107514726" name="Footer Placeholder 4"/>
+          <p:cNvPr id="161540264" name="Footer Placeholder 4"/>
           <p:cNvSpPr>
             <a:spLocks noGrp="1"/>
           </p:cNvSpPr>
@@ -4152,7 +4152,7 @@
       </p:sp>
       <p:sp>
         <p:nvSpPr>
-          <p:cNvPr id="133512878" name="Slide Number Placeholder 5"/>
+          <p:cNvPr id="127498545" name="Slide Number Placeholder 5"/>
           <p:cNvSpPr>
             <a:spLocks noGrp="1"/>
           </p:cNvSpPr>
@@ -4210,7 +4210,7 @@
       </p:grpSpPr>
       <p:sp>
         <p:nvSpPr>
-          <p:cNvPr id="1830594117" name="Title 1"/>
+          <p:cNvPr id="848767838" name="Title 1"/>
           <p:cNvSpPr>
             <a:spLocks noGrp="1"/>
           </p:cNvSpPr>
@@ -4221,7 +4221,7 @@
         <p:spPr bwMode="auto">
           <a:xfrm>
             <a:off x="1309510" y="457200"/>
-            <a:ext cx="10272889" cy="1981199"/>
+            <a:ext cx="10272888" cy="1981199"/>
           </a:xfrm>
         </p:spPr>
         <p:txBody>
@@ -4241,7 +4241,7 @@
       </p:sp>
       <p:sp>
         <p:nvSpPr>
-          <p:cNvPr id="1325914001" name="Content Placeholder 2"/>
+          <p:cNvPr id="629232277" name="Content Placeholder 2"/>
           <p:cNvSpPr>
             <a:spLocks noGrp="1"/>
           </p:cNvSpPr>
@@ -4252,7 +4252,7 @@
         <p:spPr bwMode="auto">
           <a:xfrm>
             <a:off x="1309510" y="2666999"/>
-            <a:ext cx="10272889" cy="3332815"/>
+            <a:ext cx="10272888" cy="3332815"/>
           </a:xfrm>
         </p:spPr>
         <p:txBody>
@@ -4312,7 +4312,7 @@
       </p:sp>
       <p:sp>
         <p:nvSpPr>
-          <p:cNvPr id="44579099" name="Date Placeholder 3"/>
+          <p:cNvPr id="2047059542" name="Date Placeholder 3"/>
           <p:cNvSpPr>
             <a:spLocks noGrp="1"/>
           </p:cNvSpPr>
@@ -4339,7 +4339,7 @@
       </p:sp>
       <p:sp>
         <p:nvSpPr>
-          <p:cNvPr id="999182241" name="Footer Placeholder 4"/>
+          <p:cNvPr id="1668714409" name="Footer Placeholder 4"/>
           <p:cNvSpPr>
             <a:spLocks noGrp="1"/>
           </p:cNvSpPr>
@@ -4366,7 +4366,7 @@
       </p:sp>
       <p:sp>
         <p:nvSpPr>
-          <p:cNvPr id="43373081" name="Slide Number Placeholder 5"/>
+          <p:cNvPr id="573717103" name="Slide Number Placeholder 5"/>
           <p:cNvSpPr>
             <a:spLocks noGrp="1"/>
           </p:cNvSpPr>
@@ -4429,7 +4429,7 @@
       </p:grpSpPr>
       <p:sp>
         <p:nvSpPr>
-          <p:cNvPr id="1032959918" name="Title 1"/>
+          <p:cNvPr id="1811594507" name="Title 1"/>
           <p:cNvSpPr>
             <a:spLocks noGrp="1"/>
           </p:cNvSpPr>
@@ -4464,7 +4464,7 @@
       </p:sp>
       <p:sp>
         <p:nvSpPr>
-          <p:cNvPr id="1739543878" name="Text Placeholder 2"/>
+          <p:cNvPr id="851815512" name="Text Placeholder 2"/>
           <p:cNvSpPr>
             <a:spLocks noGrp="1"/>
           </p:cNvSpPr>
@@ -4586,7 +4586,7 @@
       </p:sp>
       <p:sp>
         <p:nvSpPr>
-          <p:cNvPr id="1770860963" name="Date Placeholder 3"/>
+          <p:cNvPr id="93393693" name="Date Placeholder 3"/>
           <p:cNvSpPr>
             <a:spLocks noGrp="1"/>
           </p:cNvSpPr>
@@ -4608,7 +4608,7 @@
       </p:sp>
       <p:sp>
         <p:nvSpPr>
-          <p:cNvPr id="667667390" name="Footer Placeholder 4"/>
+          <p:cNvPr id="359798802" name="Footer Placeholder 4"/>
           <p:cNvSpPr>
             <a:spLocks noGrp="1"/>
           </p:cNvSpPr>
@@ -4630,7 +4630,7 @@
       </p:sp>
       <p:sp>
         <p:nvSpPr>
-          <p:cNvPr id="1206087213" name="Slide Number Placeholder 5"/>
+          <p:cNvPr id="49663286" name="Slide Number Placeholder 5"/>
           <p:cNvSpPr>
             <a:spLocks noGrp="1"/>
           </p:cNvSpPr>
@@ -4693,7 +4693,7 @@
       </p:grpSpPr>
       <p:sp>
         <p:nvSpPr>
-          <p:cNvPr id="1339341437" name="Title 1"/>
+          <p:cNvPr id="967931341" name="Title 1"/>
           <p:cNvSpPr>
             <a:spLocks noGrp="1"/>
           </p:cNvSpPr>
@@ -4704,7 +4704,7 @@
         <p:spPr bwMode="auto">
           <a:xfrm>
             <a:off x="1309510" y="685800"/>
-            <a:ext cx="10272889" cy="1752598"/>
+            <a:ext cx="10272888" cy="1752598"/>
           </a:xfrm>
         </p:spPr>
         <p:txBody>
@@ -4724,7 +4724,7 @@
       </p:sp>
       <p:sp>
         <p:nvSpPr>
-          <p:cNvPr id="822504811" name="Content Placeholder 2"/>
+          <p:cNvPr id="362344451" name="Content Placeholder 2"/>
           <p:cNvSpPr>
             <a:spLocks noGrp="1"/>
           </p:cNvSpPr>
@@ -4825,7 +4825,7 @@
       </p:sp>
       <p:sp>
         <p:nvSpPr>
-          <p:cNvPr id="2098321875" name="Content Placeholder 3"/>
+          <p:cNvPr id="1276107595" name="Content Placeholder 3"/>
           <p:cNvSpPr>
             <a:spLocks noGrp="1"/>
           </p:cNvSpPr>
@@ -4835,7 +4835,7 @@
         </p:nvSpPr>
         <p:spPr bwMode="auto">
           <a:xfrm>
-            <a:off x="6595871" y="2666999"/>
+            <a:off x="6595870" y="2666999"/>
             <a:ext cx="4986527" cy="3346823"/>
           </a:xfrm>
         </p:spPr>
@@ -4926,7 +4926,7 @@
       </p:sp>
       <p:sp>
         <p:nvSpPr>
-          <p:cNvPr id="1324412887" name="Date Placeholder 4"/>
+          <p:cNvPr id="200149818" name="Date Placeholder 4"/>
           <p:cNvSpPr>
             <a:spLocks noGrp="1"/>
           </p:cNvSpPr>
@@ -4948,7 +4948,7 @@
       </p:sp>
       <p:sp>
         <p:nvSpPr>
-          <p:cNvPr id="1518272619" name="Footer Placeholder 5"/>
+          <p:cNvPr id="1512999746" name="Footer Placeholder 5"/>
           <p:cNvSpPr>
             <a:spLocks noGrp="1"/>
           </p:cNvSpPr>
@@ -4970,7 +4970,7 @@
       </p:sp>
       <p:sp>
         <p:nvSpPr>
-          <p:cNvPr id="1174893088" name="Slide Number Placeholder 6"/>
+          <p:cNvPr id="477901161" name="Slide Number Placeholder 6"/>
           <p:cNvSpPr>
             <a:spLocks noGrp="1"/>
           </p:cNvSpPr>
@@ -5028,7 +5028,7 @@
       </p:grpSpPr>
       <p:sp>
         <p:nvSpPr>
-          <p:cNvPr id="1520743690" name="Title 1"/>
+          <p:cNvPr id="2142780363" name="Title 1"/>
           <p:cNvSpPr>
             <a:spLocks noGrp="1"/>
           </p:cNvSpPr>
@@ -5058,7 +5058,7 @@
       </p:sp>
       <p:sp>
         <p:nvSpPr>
-          <p:cNvPr id="2041818553" name="Text Placeholder 2"/>
+          <p:cNvPr id="55746135" name="Text Placeholder 2"/>
           <p:cNvSpPr>
             <a:spLocks noGrp="1"/>
           </p:cNvSpPr>
@@ -5134,7 +5134,7 @@
       </p:sp>
       <p:sp>
         <p:nvSpPr>
-          <p:cNvPr id="1339180968" name="Content Placeholder 3"/>
+          <p:cNvPr id="476383988" name="Content Placeholder 3"/>
           <p:cNvSpPr>
             <a:spLocks noGrp="1"/>
           </p:cNvSpPr>
@@ -5235,7 +5235,7 @@
       </p:sp>
       <p:sp>
         <p:nvSpPr>
-          <p:cNvPr id="597976861" name="Text Placeholder 4"/>
+          <p:cNvPr id="152781743" name="Text Placeholder 4"/>
           <p:cNvSpPr>
             <a:spLocks noGrp="1"/>
           </p:cNvSpPr>
@@ -5311,7 +5311,7 @@
       </p:sp>
       <p:sp>
         <p:nvSpPr>
-          <p:cNvPr id="388452503" name="Content Placeholder 5"/>
+          <p:cNvPr id="1118390317" name="Content Placeholder 5"/>
           <p:cNvSpPr>
             <a:spLocks noGrp="1"/>
           </p:cNvSpPr>
@@ -5412,7 +5412,7 @@
       </p:sp>
       <p:sp>
         <p:nvSpPr>
-          <p:cNvPr id="1142613173" name="Date Placeholder 6"/>
+          <p:cNvPr id="1589552784" name="Date Placeholder 6"/>
           <p:cNvSpPr>
             <a:spLocks noGrp="1"/>
           </p:cNvSpPr>
@@ -5434,7 +5434,7 @@
       </p:sp>
       <p:sp>
         <p:nvSpPr>
-          <p:cNvPr id="990410964" name="Footer Placeholder 7"/>
+          <p:cNvPr id="1798476867" name="Footer Placeholder 7"/>
           <p:cNvSpPr>
             <a:spLocks noGrp="1"/>
           </p:cNvSpPr>
@@ -5456,7 +5456,7 @@
       </p:sp>
       <p:sp>
         <p:nvSpPr>
-          <p:cNvPr id="1646408773" name="Slide Number Placeholder 8"/>
+          <p:cNvPr id="25995720" name="Slide Number Placeholder 8"/>
           <p:cNvSpPr>
             <a:spLocks noGrp="1"/>
           </p:cNvSpPr>
@@ -5514,7 +5514,7 @@
       </p:grpSpPr>
       <p:sp>
         <p:nvSpPr>
-          <p:cNvPr id="691969309" name="Title 1"/>
+          <p:cNvPr id="247759026" name="Title 1"/>
           <p:cNvSpPr>
             <a:spLocks noGrp="1"/>
           </p:cNvSpPr>
@@ -5540,7 +5540,7 @@
       </p:sp>
       <p:sp>
         <p:nvSpPr>
-          <p:cNvPr id="1578770990" name="Date Placeholder 2"/>
+          <p:cNvPr id="445292920" name="Date Placeholder 2"/>
           <p:cNvSpPr>
             <a:spLocks noGrp="1"/>
           </p:cNvSpPr>
@@ -5562,7 +5562,7 @@
       </p:sp>
       <p:sp>
         <p:nvSpPr>
-          <p:cNvPr id="611914408" name="Footer Placeholder 3"/>
+          <p:cNvPr id="30428326" name="Footer Placeholder 3"/>
           <p:cNvSpPr>
             <a:spLocks noGrp="1"/>
           </p:cNvSpPr>
@@ -5584,7 +5584,7 @@
       </p:sp>
       <p:sp>
         <p:nvSpPr>
-          <p:cNvPr id="1049944479" name="Slide Number Placeholder 4"/>
+          <p:cNvPr id="202186813" name="Slide Number Placeholder 4"/>
           <p:cNvSpPr>
             <a:spLocks noGrp="1"/>
           </p:cNvSpPr>
@@ -5642,7 +5642,7 @@
       </p:grpSpPr>
       <p:sp>
         <p:nvSpPr>
-          <p:cNvPr id="1269679979" name="Date Placeholder 1"/>
+          <p:cNvPr id="858164018" name="Date Placeholder 1"/>
           <p:cNvSpPr>
             <a:spLocks noGrp="1"/>
           </p:cNvSpPr>
@@ -5664,7 +5664,7 @@
       </p:sp>
       <p:sp>
         <p:nvSpPr>
-          <p:cNvPr id="1948289242" name="Footer Placeholder 2"/>
+          <p:cNvPr id="1926409770" name="Footer Placeholder 2"/>
           <p:cNvSpPr>
             <a:spLocks noGrp="1"/>
           </p:cNvSpPr>
@@ -5686,7 +5686,7 @@
       </p:sp>
       <p:sp>
         <p:nvSpPr>
-          <p:cNvPr id="436846022" name="Slide Number Placeholder 3"/>
+          <p:cNvPr id="521081571" name="Slide Number Placeholder 3"/>
           <p:cNvSpPr>
             <a:spLocks noGrp="1"/>
           </p:cNvSpPr>
@@ -5744,7 +5744,7 @@
       </p:grpSpPr>
       <p:sp>
         <p:nvSpPr>
-          <p:cNvPr id="2044124229" name="Title 1"/>
+          <p:cNvPr id="168236714" name="Title 1"/>
           <p:cNvSpPr>
             <a:spLocks noGrp="1"/>
           </p:cNvSpPr>
@@ -5781,7 +5781,7 @@
       </p:sp>
       <p:sp>
         <p:nvSpPr>
-          <p:cNvPr id="1911884567" name="Content Placeholder 2"/>
+          <p:cNvPr id="1979482330" name="Content Placeholder 2"/>
           <p:cNvSpPr>
             <a:spLocks noGrp="1"/>
           </p:cNvSpPr>
@@ -5882,7 +5882,7 @@
       </p:sp>
       <p:sp>
         <p:nvSpPr>
-          <p:cNvPr id="345199715" name="Text Placeholder 3"/>
+          <p:cNvPr id="2125451645" name="Text Placeholder 3"/>
           <p:cNvSpPr>
             <a:spLocks noGrp="1"/>
           </p:cNvSpPr>
@@ -5952,7 +5952,7 @@
       </p:sp>
       <p:sp>
         <p:nvSpPr>
-          <p:cNvPr id="137298465" name="Date Placeholder 4"/>
+          <p:cNvPr id="586231398" name="Date Placeholder 4"/>
           <p:cNvSpPr>
             <a:spLocks noGrp="1"/>
           </p:cNvSpPr>
@@ -5974,7 +5974,7 @@
       </p:sp>
       <p:sp>
         <p:nvSpPr>
-          <p:cNvPr id="258171003" name="Footer Placeholder 5"/>
+          <p:cNvPr id="137425901" name="Footer Placeholder 5"/>
           <p:cNvSpPr>
             <a:spLocks noGrp="1"/>
           </p:cNvSpPr>
@@ -5996,7 +5996,7 @@
       </p:sp>
       <p:sp>
         <p:nvSpPr>
-          <p:cNvPr id="1205859747" name="Slide Number Placeholder 6"/>
+          <p:cNvPr id="358477555" name="Slide Number Placeholder 6"/>
           <p:cNvSpPr>
             <a:spLocks noGrp="1"/>
           </p:cNvSpPr>
@@ -6054,7 +6054,7 @@
       </p:grpSpPr>
       <p:sp>
         <p:nvSpPr>
-          <p:cNvPr id="1606364563" name="Title 1"/>
+          <p:cNvPr id="757517151" name="Title 1"/>
           <p:cNvSpPr>
             <a:spLocks noGrp="1"/>
           </p:cNvSpPr>
@@ -6091,7 +6091,7 @@
       </p:sp>
       <p:sp>
         <p:nvSpPr>
-          <p:cNvPr id="1333126715" name="Picture Placeholder 2"/>
+          <p:cNvPr id="622796747" name="Picture Placeholder 2"/>
           <p:cNvSpPr>
             <a:spLocks noChangeAspect="1" noGrp="1"/>
           </p:cNvSpPr>
@@ -6188,7 +6188,7 @@
       </p:sp>
       <p:sp>
         <p:nvSpPr>
-          <p:cNvPr id="754801324" name="Text Placeholder 3"/>
+          <p:cNvPr id="356327366" name="Text Placeholder 3"/>
           <p:cNvSpPr>
             <a:spLocks noGrp="1"/>
           </p:cNvSpPr>
@@ -6258,7 +6258,7 @@
       </p:sp>
       <p:sp>
         <p:nvSpPr>
-          <p:cNvPr id="879583862" name="Date Placeholder 4"/>
+          <p:cNvPr id="1641946311" name="Date Placeholder 4"/>
           <p:cNvSpPr>
             <a:spLocks noGrp="1"/>
           </p:cNvSpPr>
@@ -6280,7 +6280,7 @@
       </p:sp>
       <p:sp>
         <p:nvSpPr>
-          <p:cNvPr id="148945504" name="Footer Placeholder 5"/>
+          <p:cNvPr id="1454898015" name="Footer Placeholder 5"/>
           <p:cNvSpPr>
             <a:spLocks noGrp="1"/>
           </p:cNvSpPr>
@@ -6302,7 +6302,7 @@
       </p:sp>
       <p:sp>
         <p:nvSpPr>
-          <p:cNvPr id="1804246554" name="Slide Number Placeholder 6"/>
+          <p:cNvPr id="1888370539" name="Slide Number Placeholder 6"/>
           <p:cNvSpPr>
             <a:spLocks noGrp="1"/>
           </p:cNvSpPr>
@@ -6365,16 +6365,16 @@
       </p:grpSpPr>
       <p:grpSp>
         <p:nvGrpSpPr>
-          <p:cNvPr id="1204495994" name="Group 13"/>
+          <p:cNvPr id="1978836360" name="Group 13"/>
           <p:cNvGrpSpPr/>
           <p:nvPr/>
         </p:nvGrpSpPr>
         <p:grpSpPr bwMode="auto">
           <a:xfrm>
             <a:off x="0" y="0"/>
-            <a:ext cx="2842683" cy="6858000"/>
+            <a:ext cx="2842682" cy="6858000"/>
             <a:chOff x="0" y="0"/>
-            <a:chExt cx="2842683" cy="6858000"/>
+            <a:chExt cx="2842682" cy="6858000"/>
           </a:xfrm>
         </p:grpSpPr>
         <p:sp>
@@ -6435,7 +6435,7 @@
           <p:spPr bwMode="auto">
             <a:xfrm>
               <a:off x="0" y="0"/>
-              <a:ext cx="1011766" cy="4624387"/>
+              <a:ext cx="1011766" cy="4624386"/>
             </a:xfrm>
             <a:custGeom>
               <a:avLst/>
@@ -6581,7 +6581,7 @@
           <p:spPr bwMode="auto">
             <a:xfrm>
               <a:off x="0" y="5257800"/>
-              <a:ext cx="2842683" cy="1600200"/>
+              <a:ext cx="2842682" cy="1600200"/>
             </a:xfrm>
             <a:custGeom>
               <a:avLst/>
@@ -6675,7 +6675,7 @@
       </p:grpSp>
       <p:sp>
         <p:nvSpPr>
-          <p:cNvPr id="1685434970" name="Title Placeholder 1"/>
+          <p:cNvPr id="1983095293" name="Title Placeholder 1"/>
           <p:cNvSpPr>
             <a:spLocks noGrp="1"/>
           </p:cNvSpPr>
@@ -6686,7 +6686,7 @@
         <p:spPr bwMode="auto">
           <a:xfrm>
             <a:off x="1309510" y="457200"/>
-            <a:ext cx="10272889" cy="1981199"/>
+            <a:ext cx="10272888" cy="1981199"/>
           </a:xfrm>
           <a:prstGeom prst="rect">
             <a:avLst/>
@@ -6712,7 +6712,7 @@
       </p:sp>
       <p:sp>
         <p:nvSpPr>
-          <p:cNvPr id="1057117025" name="Text Placeholder 2"/>
+          <p:cNvPr id="1644316497" name="Text Placeholder 2"/>
           <p:cNvSpPr>
             <a:spLocks noGrp="1"/>
           </p:cNvSpPr>
@@ -6788,7 +6788,7 @@
       </p:sp>
       <p:sp>
         <p:nvSpPr>
-          <p:cNvPr id="1191974548" name="Date Placeholder 3"/>
+          <p:cNvPr id="1370938675" name="Date Placeholder 3"/>
           <p:cNvSpPr>
             <a:spLocks noGrp="1"/>
           </p:cNvSpPr>
@@ -6827,7 +6827,7 @@
       </p:sp>
       <p:sp>
         <p:nvSpPr>
-          <p:cNvPr id="1130377478" name="Footer Placeholder 4"/>
+          <p:cNvPr id="1594846353" name="Footer Placeholder 4"/>
           <p:cNvSpPr>
             <a:spLocks noGrp="1"/>
           </p:cNvSpPr>
@@ -6866,7 +6866,7 @@
       </p:sp>
       <p:sp>
         <p:nvSpPr>
-          <p:cNvPr id="1052066593" name="Slide Number Placeholder 5"/>
+          <p:cNvPr id="768284372" name="Slide Number Placeholder 5"/>
           <p:cNvSpPr>
             <a:spLocks noGrp="1"/>
           </p:cNvSpPr>
@@ -7349,7 +7349,7 @@
       </p:grpSpPr>
       <p:sp>
         <p:nvSpPr>
-          <p:cNvPr id="465688310" name="Slide Number Placeholder 5"/>
+          <p:cNvPr id="842608649" name="Slide Number Placeholder 5"/>
           <p:cNvSpPr>
             <a:spLocks noGrp="1"/>
           </p:cNvSpPr>
@@ -7372,9 +7372,9 @@
               <a:buNone/>
               <a:defRPr/>
             </a:pPr>
-            <a:fld id="{4E5CC3B4-8D07-D91D-18ED-8BAE59202904}" type="slidenum">
-              <a:rPr lang="en-US"/>
-              <a:t>26</a:t>
+            <a:fld id="{0C4A93F9-A6C2-48AD-35CF-DEBBDC443905}" type="slidenum">
+              <a:rPr lang="en-US"/>
+              <a:t>1</a:t>
             </a:fld>
             <a:endParaRPr lang="en-US"/>
           </a:p>
@@ -7382,14 +7382,14 @@
       </p:sp>
       <p:sp>
         <p:nvSpPr>
-          <p:cNvPr id="256335743" name=""/>
+          <p:cNvPr id="315124935" name=""/>
           <p:cNvSpPr txBox="1"/>
           <p:nvPr/>
         </p:nvSpPr>
         <p:spPr bwMode="auto">
           <a:xfrm rot="0" flipH="0" flipV="0">
-            <a:off x="1382343" y="714375"/>
-            <a:ext cx="9711873" cy="4633319"/>
+            <a:off x="1382341" y="714375"/>
+            <a:ext cx="9716911" cy="4541879"/>
           </a:xfrm>
           <a:prstGeom prst="rect">
             <a:avLst/>
@@ -7405,17 +7405,19 @@
               <a:defRPr/>
             </a:pPr>
             <a:r>
-              <a:rPr sz="2800" b="1" i="0" u="none">
-                <a:solidFill>
-                  <a:schemeClr val="tx1"/>
+              <a:rPr sz="2600" b="1" i="0" u="none">
+                <a:solidFill>
+                  <a:schemeClr val="accent1">
+                    <a:lumMod val="50000"/>
+                  </a:schemeClr>
                 </a:solidFill>
                 <a:latin typeface="Times New Roman"/>
                 <a:ea typeface="Times New Roman"/>
                 <a:cs typeface="Times New Roman"/>
               </a:rPr>
-              <a:t>1. Efficient Deep Learning Approaches for Processing Ultra-Widefield Retinal Imaging</a:t>
-            </a:r>
-            <a:endParaRPr sz="2800">
+              <a:t>2. Exploring Deep Learning and Ultra-Widefield Imaging for Diabetic Retinopathy and Macular Edema</a:t>
+            </a:r>
+            <a:endParaRPr sz="2600">
               <a:solidFill>
                 <a:schemeClr val="tx1"/>
               </a:solidFill>
@@ -7428,7 +7430,7 @@
               <a:defRPr/>
             </a:pPr>
             <a:r>
-              <a:rPr sz="2200" b="0" i="1" u="none">
+              <a:rPr sz="2000" b="0" i="1" u="none">
                 <a:solidFill>
                   <a:schemeClr val="tx1"/>
                 </a:solidFill>
@@ -7436,9 +7438,9 @@
                 <a:ea typeface="Times New Roman"/>
                 <a:cs typeface="Times New Roman"/>
               </a:rPr>
-              <a:t>Kim et al., 2025, arXiv preprint</a:t>
-            </a:r>
-            <a:endParaRPr sz="2800">
+              <a:t>Jimenez-Lizcano et al., March 2026, arXiv (CC BY-NC-ND 4.0)</a:t>
+            </a:r>
+            <a:endParaRPr sz="2600">
               <a:solidFill>
                 <a:schemeClr val="tx1"/>
               </a:solidFill>
@@ -7453,7 +7455,7 @@
               <a:defRPr/>
             </a:pPr>
             <a:r>
-              <a:rPr sz="2200" b="1" i="0" u="none">
+              <a:rPr sz="2000" b="1" i="0" u="none">
                 <a:solidFill>
                   <a:schemeClr val="tx1"/>
                 </a:solidFill>
@@ -7464,7 +7466,7 @@
               <a:t>Methodology:</a:t>
             </a:r>
             <a:r>
-              <a:rPr sz="2200" b="0" i="0" u="none">
+              <a:rPr sz="2000" b="0" i="0" u="none">
                 <a:solidFill>
                   <a:schemeClr val="tx1"/>
                 </a:solidFill>
@@ -7472,9 +7474,9 @@
                 <a:ea typeface="Times New Roman"/>
                 <a:cs typeface="Times New Roman"/>
               </a:rPr>
-              <a:t> Ensemble of three EfficientNet-B0 models with augmentation (center crop, flips, rotation, color jitter) and soft voting. It is designed to train and run on a CPU.</a:t>
-            </a:r>
-            <a:endParaRPr sz="2800">
+              <a:t> Benchmarks MobileNetV2, ResNet18, ViT-B/16 and the RETFound foundation model on RGB and frequency-domain (DFT) inputs. It adds feature-level fusion with an MLP and Grad-CAM explainability.</a:t>
+            </a:r>
+            <a:endParaRPr sz="2600">
               <a:solidFill>
                 <a:schemeClr val="tx1"/>
               </a:solidFill>
@@ -7489,7 +7491,7 @@
               <a:defRPr/>
             </a:pPr>
             <a:r>
-              <a:rPr sz="2200" b="1" i="0" u="none">
+              <a:rPr sz="2000" b="1" i="0" u="none">
                 <a:solidFill>
                   <a:schemeClr val="tx1"/>
                 </a:solidFill>
@@ -7500,7 +7502,7 @@
               <a:t>Dataset:</a:t>
             </a:r>
             <a:r>
-              <a:rPr sz="2200" b="0" i="0" u="none">
+              <a:rPr sz="2000" b="0" i="0" u="none">
                 <a:solidFill>
                   <a:schemeClr val="tx1"/>
                 </a:solidFill>
@@ -7508,9 +7510,9 @@
                 <a:ea typeface="Times New Roman"/>
                 <a:cs typeface="Times New Roman"/>
               </a:rPr>
-              <a:t> MICCAI UWF4DR challenge data, using the referable-DR and DME tasks.</a:t>
-            </a:r>
-            <a:endParaRPr sz="2800">
+              <a:t> UWF4DR challenge set with their own 64/16/20 split (about 251 images for referable DR and 212 for DME).</a:t>
+            </a:r>
+            <a:endParaRPr sz="2600">
               <a:solidFill>
                 <a:schemeClr val="tx1"/>
               </a:solidFill>
@@ -7525,7 +7527,7 @@
               <a:defRPr/>
             </a:pPr>
             <a:r>
-              <a:rPr sz="2200" b="1" i="0" u="none">
+              <a:rPr sz="2000" b="1" i="0" u="none">
                 <a:solidFill>
                   <a:schemeClr val="tx1"/>
                 </a:solidFill>
@@ -7536,7 +7538,7 @@
               <a:t>Advantages:</a:t>
             </a:r>
             <a:r>
-              <a:rPr sz="2200" b="0" i="0" u="none">
+              <a:rPr sz="2000" b="0" i="0" u="none">
                 <a:solidFill>
                   <a:schemeClr val="tx1"/>
                 </a:solidFill>
@@ -7544,9 +7546,9 @@
                 <a:ea typeface="Times New Roman"/>
                 <a:cs typeface="Times New Roman"/>
               </a:rPr>
-              <a:t> Lightweight and needs no GPU, so it suits low-resource clinics.</a:t>
-            </a:r>
-            <a:endParaRPr sz="2800">
+              <a:t> Covers all three tasks (quality, referable DR, DME) and includes public code and explainability.</a:t>
+            </a:r>
+            <a:endParaRPr sz="2600">
               <a:solidFill>
                 <a:schemeClr val="tx1"/>
               </a:solidFill>
@@ -7561,7 +7563,7 @@
               <a:defRPr/>
             </a:pPr>
             <a:r>
-              <a:rPr sz="2200" b="1" i="0" u="none">
+              <a:rPr sz="2000" b="1" i="0" u="none">
                 <a:solidFill>
                   <a:schemeClr val="tx1"/>
                 </a:solidFill>
@@ -7572,7 +7574,7 @@
               <a:t>Limitations:</a:t>
             </a:r>
             <a:r>
-              <a:rPr sz="2200" b="0" i="0" u="none">
+              <a:rPr sz="2000" b="0" i="0" u="none">
                 <a:solidFill>
                   <a:schemeClr val="tx1"/>
                 </a:solidFill>
@@ -7580,9 +7582,9 @@
                 <a:ea typeface="Times New Roman"/>
                 <a:cs typeface="Times New Roman"/>
               </a:rPr>
-              <a:t> The ensemble roughly doubles inference time. The dataset is small, and the team placed 9th in the challenge.</a:t>
-            </a:r>
-            <a:endParaRPr sz="2800">
+              <a:t> Single dataset, binary tasks only, and very small test sets.</a:t>
+            </a:r>
+            <a:endParaRPr sz="2600">
               <a:solidFill>
                 <a:schemeClr val="tx1"/>
               </a:solidFill>
@@ -7597,7 +7599,7 @@
               <a:defRPr/>
             </a:pPr>
             <a:r>
-              <a:rPr sz="2200" b="1" i="0" u="none">
+              <a:rPr sz="2000" b="1" i="0" u="none">
                 <a:solidFill>
                   <a:schemeClr val="tx1"/>
                 </a:solidFill>
@@ -7608,7 +7610,7 @@
               <a:t>Results:</a:t>
             </a:r>
             <a:r>
-              <a:rPr sz="2200" b="0" i="0" u="none">
+              <a:rPr sz="2000" b="0" i="0" u="none">
                 <a:solidFill>
                   <a:schemeClr val="tx1"/>
                 </a:solidFill>
@@ -7616,9 +7618,9 @@
                 <a:ea typeface="Times New Roman"/>
                 <a:cs typeface="Times New Roman"/>
               </a:rPr>
-              <a:t> Ensemble AUROC of 0.9662 (referable DR) and 0.9584 (DME).</a:t>
-            </a:r>
-            <a:endParaRPr sz="2800">
+              <a:t> RGB fusion gets 100% on referable DR (treat with caution, since the test set is only 50 images), AUROC 96.8% on DME and 96.4% on quality assessment.</a:t>
+            </a:r>
+            <a:endParaRPr sz="2600">
               <a:solidFill>
                 <a:schemeClr val="tx1"/>
               </a:solidFill>
@@ -7633,7 +7635,7 @@
               <a:defRPr/>
             </a:pPr>
             <a:r>
-              <a:rPr sz="2200" b="1" i="0" u="none">
+              <a:rPr sz="2000" b="1" i="0" u="none">
                 <a:solidFill>
                   <a:schemeClr val="tx1"/>
                 </a:solidFill>
@@ -7644,7 +7646,7 @@
               <a:t>Download:</a:t>
             </a:r>
             <a:r>
-              <a:rPr sz="2200" b="0" i="0" u="none">
+              <a:rPr sz="2000" b="0" i="0" u="none">
                 <a:solidFill>
                   <a:schemeClr val="tx1"/>
                 </a:solidFill>
@@ -7655,7 +7657,7 @@
               <a:t> </a:t>
             </a:r>
             <a:r>
-              <a:rPr sz="2200" b="0" i="0" u="sng">
+              <a:rPr sz="2000" b="0" i="0" u="sng">
                 <a:solidFill>
                   <a:schemeClr val="tx1"/>
                 </a:solidFill>
@@ -7664,10 +7666,10 @@
                 <a:cs typeface="Times New Roman"/>
                 <a:hlinkClick r:id="rId3" tooltip=""/>
               </a:rPr>
-              <a:t>arXiv PDF</a:t>
-            </a:r>
-            <a:r>
-              <a:rPr sz="2200" b="0" i="0" u="none">
+              <a:t>arXiv HTML</a:t>
+            </a:r>
+            <a:r>
+              <a:rPr sz="2000" b="0" i="0" u="none">
                 <a:solidFill>
                   <a:schemeClr val="tx1"/>
                 </a:solidFill>
@@ -7678,7 +7680,7 @@
               <a:t> · </a:t>
             </a:r>
             <a:r>
-              <a:rPr sz="2200" b="0" i="0" u="sng">
+              <a:rPr sz="2000" b="0" i="0" u="sng">
                 <a:solidFill>
                   <a:schemeClr val="tx1"/>
                 </a:solidFill>
@@ -7687,9 +7689,32 @@
                 <a:cs typeface="Times New Roman"/>
                 <a:hlinkClick r:id="rId4" tooltip=""/>
               </a:rPr>
-              <a:t>Abstract page</a:t>
-            </a:r>
-            <a:endParaRPr sz="2800">
+              <a:t>arXiv PDF</a:t>
+            </a:r>
+            <a:r>
+              <a:rPr sz="2000" b="0" i="0" u="none">
+                <a:solidFill>
+                  <a:schemeClr val="tx1"/>
+                </a:solidFill>
+                <a:latin typeface="Times New Roman"/>
+                <a:ea typeface="Times New Roman"/>
+                <a:cs typeface="Times New Roman"/>
+              </a:rPr>
+              <a:t> · </a:t>
+            </a:r>
+            <a:r>
+              <a:rPr sz="2000" b="0" i="0" u="sng">
+                <a:solidFill>
+                  <a:schemeClr val="tx1"/>
+                </a:solidFill>
+                <a:latin typeface="Times New Roman"/>
+                <a:ea typeface="Times New Roman"/>
+                <a:cs typeface="Times New Roman"/>
+                <a:hlinkClick r:id="rId5" tooltip=""/>
+              </a:rPr>
+              <a:t>Code</a:t>
+            </a:r>
+            <a:endParaRPr sz="2600">
               <a:solidFill>
                 <a:schemeClr val="tx1"/>
               </a:solidFill>
@@ -7699,6 +7724,32 @@
           </a:p>
         </p:txBody>
       </p:sp>
+      <p:pic>
+        <p:nvPicPr>
+          <p:cNvPr id="1599209396" name="Google Shape;130;p13"/>
+          <p:cNvPicPr/>
+          <p:nvPr/>
+        </p:nvPicPr>
+        <p:blipFill rotWithShape="1">
+          <a:blip r:embed="rId6">
+            <a:alphaModFix/>
+          </a:blip>
+          <a:stretch/>
+        </p:blipFill>
+        <p:spPr bwMode="auto">
+          <a:xfrm>
+            <a:off x="10163432" y="476672"/>
+            <a:ext cx="1135965" cy="739033"/>
+          </a:xfrm>
+          <a:prstGeom prst="rect">
+            <a:avLst/>
+          </a:prstGeom>
+          <a:noFill/>
+          <a:ln>
+            <a:noFill/>
+          </a:ln>
+        </p:spPr>
+      </p:pic>
     </p:spTree>
   </p:cSld>
   <p:clrMapOvr>
@@ -7734,7 +7785,7 @@
       </p:grpSpPr>
       <p:sp>
         <p:nvSpPr>
-          <p:cNvPr id="516122575" name="Slide Number Placeholder 5"/>
+          <p:cNvPr id="1758314880" name="Slide Number Placeholder 5"/>
           <p:cNvSpPr>
             <a:spLocks noGrp="1"/>
           </p:cNvSpPr>
@@ -7757,9 +7808,9 @@
               <a:buNone/>
               <a:defRPr/>
             </a:pPr>
-            <a:fld id="{0C4A93F9-A6C2-48AD-35CF-DEBBDC443905}" type="slidenum">
-              <a:rPr lang="en-US"/>
-              <a:t>1</a:t>
+            <a:fld id="{4E5CC3B4-8D07-D91D-18ED-8BAE59202904}" type="slidenum">
+              <a:rPr lang="en-US"/>
+              <a:t>26</a:t>
             </a:fld>
             <a:endParaRPr lang="en-US"/>
           </a:p>
@@ -7767,14 +7818,14 @@
       </p:sp>
       <p:sp>
         <p:nvSpPr>
-          <p:cNvPr id="17630793" name=""/>
+          <p:cNvPr id="1303627342" name=""/>
           <p:cNvSpPr txBox="1"/>
           <p:nvPr/>
         </p:nvSpPr>
         <p:spPr bwMode="auto">
           <a:xfrm rot="0" flipH="0" flipV="0">
             <a:off x="1382342" y="714375"/>
-            <a:ext cx="9716192" cy="5303879"/>
+            <a:ext cx="9712592" cy="3627479"/>
           </a:xfrm>
           <a:prstGeom prst="rect">
             <a:avLst/>
@@ -7790,17 +7841,19 @@
               <a:defRPr/>
             </a:pPr>
             <a:r>
-              <a:rPr sz="2800" b="1" i="0" u="none">
-                <a:solidFill>
-                  <a:schemeClr val="tx1"/>
+              <a:rPr sz="2600" b="1" i="0" u="none">
+                <a:solidFill>
+                  <a:schemeClr val="accent1">
+                    <a:lumMod val="50000"/>
+                  </a:schemeClr>
                 </a:solidFill>
                 <a:latin typeface="Times New Roman"/>
                 <a:ea typeface="Times New Roman"/>
                 <a:cs typeface="Times New Roman"/>
               </a:rPr>
-              <a:t>2. Exploring Deep Learning and Ultra-Widefield Imaging for Diabetic Retinopathy and Macular Edema</a:t>
-            </a:r>
-            <a:endParaRPr sz="2800">
+              <a:t>1. Efficient Deep Learning Approaches for Processing Ultra-Widefield Retinal Imaging</a:t>
+            </a:r>
+            <a:endParaRPr sz="2600">
               <a:solidFill>
                 <a:schemeClr val="tx1"/>
               </a:solidFill>
@@ -7813,7 +7866,7 @@
               <a:defRPr/>
             </a:pPr>
             <a:r>
-              <a:rPr sz="2200" b="0" i="1" u="none">
+              <a:rPr sz="2000" b="0" i="1" u="none">
                 <a:solidFill>
                   <a:schemeClr val="tx1"/>
                 </a:solidFill>
@@ -7821,9 +7874,9 @@
                 <a:ea typeface="Times New Roman"/>
                 <a:cs typeface="Times New Roman"/>
               </a:rPr>
-              <a:t>Jimenez-Lizcano et al., March 2026, arXiv (CC BY-NC-ND 4.0)</a:t>
-            </a:r>
-            <a:endParaRPr sz="2800">
+              <a:t>Kim et al., 2025, arXiv preprint</a:t>
+            </a:r>
+            <a:endParaRPr sz="2600">
               <a:solidFill>
                 <a:schemeClr val="tx1"/>
               </a:solidFill>
@@ -7838,7 +7891,7 @@
               <a:defRPr/>
             </a:pPr>
             <a:r>
-              <a:rPr sz="2200" b="1" i="0" u="none">
+              <a:rPr sz="2000" b="1" i="0" u="none">
                 <a:solidFill>
                   <a:schemeClr val="tx1"/>
                 </a:solidFill>
@@ -7849,7 +7902,7 @@
               <a:t>Methodology:</a:t>
             </a:r>
             <a:r>
-              <a:rPr sz="2200" b="0" i="0" u="none">
+              <a:rPr sz="2000" b="0" i="0" u="none">
                 <a:solidFill>
                   <a:schemeClr val="tx1"/>
                 </a:solidFill>
@@ -7857,9 +7910,9 @@
                 <a:ea typeface="Times New Roman"/>
                 <a:cs typeface="Times New Roman"/>
               </a:rPr>
-              <a:t> Benchmarks MobileNetV2, ResNet18, ViT-B/16 and the RETFound foundation model on RGB and frequency-domain (DFT) inputs. It adds feature-level fusion with an MLP and Grad-CAM explainability.</a:t>
-            </a:r>
-            <a:endParaRPr sz="2800">
+              <a:t> Ensemble of three EfficientNet-B0 models with augmentation (center crop, flips, rotation, color jitter) and soft voting. It is designed to train and run on a CPU.</a:t>
+            </a:r>
+            <a:endParaRPr sz="2600">
               <a:solidFill>
                 <a:schemeClr val="tx1"/>
               </a:solidFill>
@@ -7874,7 +7927,7 @@
               <a:defRPr/>
             </a:pPr>
             <a:r>
-              <a:rPr sz="2200" b="1" i="0" u="none">
+              <a:rPr sz="2000" b="1" i="0" u="none">
                 <a:solidFill>
                   <a:schemeClr val="tx1"/>
                 </a:solidFill>
@@ -7885,7 +7938,7 @@
               <a:t>Dataset:</a:t>
             </a:r>
             <a:r>
-              <a:rPr sz="2200" b="0" i="0" u="none">
+              <a:rPr sz="2000" b="0" i="0" u="none">
                 <a:solidFill>
                   <a:schemeClr val="tx1"/>
                 </a:solidFill>
@@ -7893,9 +7946,9 @@
                 <a:ea typeface="Times New Roman"/>
                 <a:cs typeface="Times New Roman"/>
               </a:rPr>
-              <a:t> UWF4DR challenge set with their own 64/16/20 split (about 251 images for referable DR and 212 for DME).</a:t>
-            </a:r>
-            <a:endParaRPr sz="2800">
+              <a:t> MICCAI UWF4DR challenge data, using the referable-DR and DME tasks.</a:t>
+            </a:r>
+            <a:endParaRPr sz="2600">
               <a:solidFill>
                 <a:schemeClr val="tx1"/>
               </a:solidFill>
@@ -7910,7 +7963,7 @@
               <a:defRPr/>
             </a:pPr>
             <a:r>
-              <a:rPr sz="2200" b="1" i="0" u="none">
+              <a:rPr sz="2000" b="1" i="0" u="none">
                 <a:solidFill>
                   <a:schemeClr val="tx1"/>
                 </a:solidFill>
@@ -7921,7 +7974,7 @@
               <a:t>Advantages:</a:t>
             </a:r>
             <a:r>
-              <a:rPr sz="2200" b="0" i="0" u="none">
+              <a:rPr sz="2000" b="0" i="0" u="none">
                 <a:solidFill>
                   <a:schemeClr val="tx1"/>
                 </a:solidFill>
@@ -7929,9 +7982,9 @@
                 <a:ea typeface="Times New Roman"/>
                 <a:cs typeface="Times New Roman"/>
               </a:rPr>
-              <a:t> Covers all three tasks (quality, referable DR, DME) and includes public code and explainability.</a:t>
-            </a:r>
-            <a:endParaRPr sz="2800">
+              <a:t> Lightweight and needs no GPU, so it suits low-resource clinics.</a:t>
+            </a:r>
+            <a:endParaRPr sz="2600">
               <a:solidFill>
                 <a:schemeClr val="tx1"/>
               </a:solidFill>
@@ -7946,7 +7999,7 @@
               <a:defRPr/>
             </a:pPr>
             <a:r>
-              <a:rPr sz="2200" b="1" i="0" u="none">
+              <a:rPr sz="2000" b="1" i="0" u="none">
                 <a:solidFill>
                   <a:schemeClr val="tx1"/>
                 </a:solidFill>
@@ -7957,7 +8010,7 @@
               <a:t>Limitations:</a:t>
             </a:r>
             <a:r>
-              <a:rPr sz="2200" b="0" i="0" u="none">
+              <a:rPr sz="2000" b="0" i="0" u="none">
                 <a:solidFill>
                   <a:schemeClr val="tx1"/>
                 </a:solidFill>
@@ -7965,9 +8018,9 @@
                 <a:ea typeface="Times New Roman"/>
                 <a:cs typeface="Times New Roman"/>
               </a:rPr>
-              <a:t> Single dataset, binary tasks only, and very small test sets.</a:t>
-            </a:r>
-            <a:endParaRPr sz="2800">
+              <a:t> The ensemble roughly doubles inference time. The dataset is small, and the team placed 9th in the challenge.</a:t>
+            </a:r>
+            <a:endParaRPr sz="2600">
               <a:solidFill>
                 <a:schemeClr val="tx1"/>
               </a:solidFill>
@@ -7982,7 +8035,7 @@
               <a:defRPr/>
             </a:pPr>
             <a:r>
-              <a:rPr sz="2200" b="1" i="0" u="none">
+              <a:rPr sz="2000" b="1" i="0" u="none">
                 <a:solidFill>
                   <a:schemeClr val="tx1"/>
                 </a:solidFill>
@@ -7993,7 +8046,7 @@
               <a:t>Results:</a:t>
             </a:r>
             <a:r>
-              <a:rPr sz="2200" b="0" i="0" u="none">
+              <a:rPr sz="2000" b="0" i="0" u="none">
                 <a:solidFill>
                   <a:schemeClr val="tx1"/>
                 </a:solidFill>
@@ -8001,9 +8054,9 @@
                 <a:ea typeface="Times New Roman"/>
                 <a:cs typeface="Times New Roman"/>
               </a:rPr>
-              <a:t> RGB fusion gets 100% on referable DR (treat with caution, since the test set is only 50 images), AUROC 96.8% on DME and 96.4% on quality assessment.</a:t>
-            </a:r>
-            <a:endParaRPr sz="2800">
+              <a:t> Ensemble AUROC of 0.9662 (referable DR) and 0.9584 (DME).</a:t>
+            </a:r>
+            <a:endParaRPr sz="2600">
               <a:solidFill>
                 <a:schemeClr val="tx1"/>
               </a:solidFill>
@@ -8018,7 +8071,7 @@
               <a:defRPr/>
             </a:pPr>
             <a:r>
-              <a:rPr sz="2200" b="1" i="0" u="none">
+              <a:rPr sz="2000" b="1" i="0" u="none">
                 <a:solidFill>
                   <a:schemeClr val="tx1"/>
                 </a:solidFill>
@@ -8029,7 +8082,7 @@
               <a:t>Download:</a:t>
             </a:r>
             <a:r>
-              <a:rPr sz="2200" b="0" i="0" u="none">
+              <a:rPr sz="2000" b="0" i="0" u="none">
                 <a:solidFill>
                   <a:schemeClr val="tx1"/>
                 </a:solidFill>
@@ -8040,7 +8093,7 @@
               <a:t> </a:t>
             </a:r>
             <a:r>
-              <a:rPr sz="2200" b="0" i="0" u="sng">
+              <a:rPr sz="2000" b="0" i="0" u="sng">
                 <a:solidFill>
                   <a:schemeClr val="tx1"/>
                 </a:solidFill>
@@ -8049,10 +8102,10 @@
                 <a:cs typeface="Times New Roman"/>
                 <a:hlinkClick r:id="rId3" tooltip=""/>
               </a:rPr>
-              <a:t>arXiv HTML</a:t>
-            </a:r>
-            <a:r>
-              <a:rPr sz="2200" b="0" i="0" u="none">
+              <a:t>arXiv PDF</a:t>
+            </a:r>
+            <a:r>
+              <a:rPr sz="2000" b="0" i="0" u="none">
                 <a:solidFill>
                   <a:schemeClr val="tx1"/>
                 </a:solidFill>
@@ -8063,7 +8116,7 @@
               <a:t> · </a:t>
             </a:r>
             <a:r>
-              <a:rPr sz="2200" b="0" i="0" u="sng">
+              <a:rPr sz="2000" b="0" i="0" u="sng">
                 <a:solidFill>
                   <a:schemeClr val="tx1"/>
                 </a:solidFill>
@@ -8072,32 +8125,9 @@
                 <a:cs typeface="Times New Roman"/>
                 <a:hlinkClick r:id="rId4" tooltip=""/>
               </a:rPr>
-              <a:t>arXiv PDF</a:t>
-            </a:r>
-            <a:r>
-              <a:rPr sz="2200" b="0" i="0" u="none">
-                <a:solidFill>
-                  <a:schemeClr val="tx1"/>
-                </a:solidFill>
-                <a:latin typeface="Times New Roman"/>
-                <a:ea typeface="Times New Roman"/>
-                <a:cs typeface="Times New Roman"/>
-              </a:rPr>
-              <a:t> · </a:t>
-            </a:r>
-            <a:r>
-              <a:rPr sz="2200" b="0" i="0" u="sng">
-                <a:solidFill>
-                  <a:schemeClr val="tx1"/>
-                </a:solidFill>
-                <a:latin typeface="Times New Roman"/>
-                <a:ea typeface="Times New Roman"/>
-                <a:cs typeface="Times New Roman"/>
-                <a:hlinkClick r:id="rId5" tooltip=""/>
-              </a:rPr>
-              <a:t>Code</a:t>
-            </a:r>
-            <a:endParaRPr sz="2800">
+              <a:t>Abstract page</a:t>
+            </a:r>
+            <a:endParaRPr sz="2600">
               <a:solidFill>
                 <a:schemeClr val="tx1"/>
               </a:solidFill>
@@ -8107,6 +8137,32 @@
           </a:p>
         </p:txBody>
       </p:sp>
+      <p:pic>
+        <p:nvPicPr>
+          <p:cNvPr id="1167708539" name="Google Shape;130;p13"/>
+          <p:cNvPicPr/>
+          <p:nvPr/>
+        </p:nvPicPr>
+        <p:blipFill rotWithShape="1">
+          <a:blip r:embed="rId5">
+            <a:alphaModFix/>
+          </a:blip>
+          <a:stretch/>
+        </p:blipFill>
+        <p:spPr bwMode="auto">
+          <a:xfrm>
+            <a:off x="10163432" y="476672"/>
+            <a:ext cx="1135965" cy="739033"/>
+          </a:xfrm>
+          <a:prstGeom prst="rect">
+            <a:avLst/>
+          </a:prstGeom>
+          <a:noFill/>
+          <a:ln>
+            <a:noFill/>
+          </a:ln>
+        </p:spPr>
+      </p:pic>
     </p:spTree>
   </p:cSld>
   <p:clrMapOvr>
@@ -8142,7 +8198,7 @@
       </p:grpSpPr>
       <p:sp>
         <p:nvSpPr>
-          <p:cNvPr id="538961156" name="Slide Number Placeholder 5"/>
+          <p:cNvPr id="503416278" name="Slide Number Placeholder 5"/>
           <p:cNvSpPr>
             <a:spLocks noGrp="1"/>
           </p:cNvSpPr>
@@ -8175,14 +8231,14 @@
       </p:sp>
       <p:sp>
         <p:nvSpPr>
-          <p:cNvPr id="792309701" name=""/>
+          <p:cNvPr id="151884704" name=""/>
           <p:cNvSpPr txBox="1"/>
           <p:nvPr/>
         </p:nvSpPr>
         <p:spPr bwMode="auto">
           <a:xfrm rot="0" flipH="0" flipV="0">
-            <a:off x="1382342" y="714375"/>
-            <a:ext cx="9724831" cy="4968599"/>
+            <a:off x="1382341" y="714375"/>
+            <a:ext cx="9725549" cy="4541879"/>
           </a:xfrm>
           <a:prstGeom prst="rect">
             <a:avLst/>
@@ -8198,9 +8254,11 @@
               <a:defRPr/>
             </a:pPr>
             <a:r>
-              <a:rPr sz="2800" b="1" i="0" u="none">
-                <a:solidFill>
-                  <a:schemeClr val="tx1"/>
+              <a:rPr sz="2600" b="1" i="0" u="none">
+                <a:solidFill>
+                  <a:schemeClr val="accent1">
+                    <a:lumMod val="50000"/>
+                  </a:schemeClr>
                 </a:solidFill>
                 <a:latin typeface="Times New Roman"/>
                 <a:ea typeface="Times New Roman"/>
@@ -8208,7 +8266,7 @@
               </a:rPr>
               <a:t>3. Deep Learning Ensemble for Predicting Diabetic Macular Edema Onset Using Ultra-Wide Field Color Fundus Image</a:t>
             </a:r>
-            <a:endParaRPr sz="2800">
+            <a:endParaRPr sz="2600">
               <a:solidFill>
                 <a:schemeClr val="tx1"/>
               </a:solidFill>
@@ -8221,7 +8279,7 @@
               <a:defRPr/>
             </a:pPr>
             <a:r>
-              <a:rPr sz="2200" b="0" i="1" u="none">
+              <a:rPr sz="2000" b="0" i="1" u="none">
                 <a:solidFill>
                   <a:schemeClr val="tx1"/>
                 </a:solidFill>
@@ -8231,7 +8289,7 @@
               </a:rPr>
               <a:t>Qin et al., Springer LNCS 2025 (free arXiv version, CC BY)</a:t>
             </a:r>
-            <a:endParaRPr sz="2800">
+            <a:endParaRPr sz="2600">
               <a:solidFill>
                 <a:schemeClr val="tx1"/>
               </a:solidFill>
@@ -8246,7 +8304,7 @@
               <a:defRPr/>
             </a:pPr>
             <a:r>
-              <a:rPr sz="2200" b="1" i="0" u="none">
+              <a:rPr sz="2000" b="1" i="0" u="none">
                 <a:solidFill>
                   <a:schemeClr val="tx1"/>
                 </a:solidFill>
@@ -8257,7 +8315,7 @@
               <a:t>Methodology:</a:t>
             </a:r>
             <a:r>
-              <a:rPr sz="2200" b="0" i="0" u="none">
+              <a:rPr sz="2000" b="0" i="0" u="none">
                 <a:solidFill>
                   <a:schemeClr val="tx1"/>
                 </a:solidFill>
@@ -8267,7 +8325,7 @@
               </a:rPr>
               <a:t> Ensemble of ResNet, DenseNet, EfficientNet and VGG to predict center-involved DME onset within 12 months, comparing plurality voting, averaging and label fusion.</a:t>
             </a:r>
-            <a:endParaRPr sz="2800">
+            <a:endParaRPr sz="2600">
               <a:solidFill>
                 <a:schemeClr val="tx1"/>
               </a:solidFill>
@@ -8282,7 +8340,7 @@
               <a:defRPr/>
             </a:pPr>
             <a:r>
-              <a:rPr sz="2200" b="1" i="0" u="none">
+              <a:rPr sz="2000" b="1" i="0" u="none">
                 <a:solidFill>
                   <a:schemeClr val="tx1"/>
                 </a:solidFill>
@@ -8293,7 +8351,7 @@
               <a:t>Dataset:</a:t>
             </a:r>
             <a:r>
-              <a:rPr sz="2200" b="0" i="0" u="none">
+              <a:rPr sz="2000" b="0" i="0" u="none">
                 <a:solidFill>
                   <a:schemeClr val="tx1"/>
                 </a:solidFill>
@@ -8303,7 +8361,7 @@
               </a:rPr>
               <a:t> DIAMOND challenge synthetic UWF-CFP images derived from DeepDRiD (204 images: 154 train, 50 validation), plus one real patient.</a:t>
             </a:r>
-            <a:endParaRPr sz="2800">
+            <a:endParaRPr sz="2600">
               <a:solidFill>
                 <a:schemeClr val="tx1"/>
               </a:solidFill>
@@ -8318,7 +8376,7 @@
               <a:defRPr/>
             </a:pPr>
             <a:r>
-              <a:rPr sz="2200" b="1" i="0" u="none">
+              <a:rPr sz="2000" b="1" i="0" u="none">
                 <a:solidFill>
                   <a:schemeClr val="tx1"/>
                 </a:solidFill>
@@ -8329,7 +8387,7 @@
               <a:t>Advantages:</a:t>
             </a:r>
             <a:r>
-              <a:rPr sz="2200" b="0" i="0" u="none">
+              <a:rPr sz="2000" b="0" i="0" u="none">
                 <a:solidFill>
                   <a:schemeClr val="tx1"/>
                 </a:solidFill>
@@ -8339,7 +8397,7 @@
               </a:rPr>
               <a:t> Predicts future DME rather than only detecting it, and aims to generalize across imaging devices.</a:t>
             </a:r>
-            <a:endParaRPr sz="2800">
+            <a:endParaRPr sz="2600">
               <a:solidFill>
                 <a:schemeClr val="tx1"/>
               </a:solidFill>
@@ -8354,7 +8412,7 @@
               <a:defRPr/>
             </a:pPr>
             <a:r>
-              <a:rPr sz="2200" b="1" i="0" u="none">
+              <a:rPr sz="2000" b="1" i="0" u="none">
                 <a:solidFill>
                   <a:schemeClr val="tx1"/>
                 </a:solidFill>
@@ -8365,7 +8423,7 @@
               <a:t>Limitations:</a:t>
             </a:r>
             <a:r>
-              <a:rPr sz="2200" b="0" i="0" u="none">
+              <a:rPr sz="2000" b="0" i="0" u="none">
                 <a:solidFill>
                   <a:schemeClr val="tx1"/>
                 </a:solidFill>
@@ -8375,7 +8433,7 @@
               </a:rPr>
               <a:t> Trained on synthetic data, and performance is modest. DenseNet-121 alone (AUC 0.7617) beat the final ensemble.</a:t>
             </a:r>
-            <a:endParaRPr sz="2800">
+            <a:endParaRPr sz="2600">
               <a:solidFill>
                 <a:schemeClr val="tx1"/>
               </a:solidFill>
@@ -8390,7 +8448,7 @@
               <a:defRPr/>
             </a:pPr>
             <a:r>
-              <a:rPr sz="2200" b="1" i="0" u="none">
+              <a:rPr sz="2000" b="1" i="0" u="none">
                 <a:solidFill>
                   <a:schemeClr val="tx1"/>
                 </a:solidFill>
@@ -8401,7 +8459,7 @@
               <a:t>Results:</a:t>
             </a:r>
             <a:r>
-              <a:rPr sz="2200" b="0" i="0" u="none">
+              <a:rPr sz="2000" b="0" i="0" u="none">
                 <a:solidFill>
                   <a:schemeClr val="tx1"/>
                 </a:solidFill>
@@ -8411,7 +8469,7 @@
               </a:rPr>
               <a:t> Final ensemble AUC 0.7017 and F1 0.6512.</a:t>
             </a:r>
-            <a:endParaRPr sz="2800">
+            <a:endParaRPr sz="2600">
               <a:solidFill>
                 <a:schemeClr val="tx1"/>
               </a:solidFill>
@@ -8426,7 +8484,7 @@
               <a:defRPr/>
             </a:pPr>
             <a:r>
-              <a:rPr sz="2200" b="1" i="0" u="none">
+              <a:rPr sz="2000" b="1" i="0" u="none">
                 <a:solidFill>
                   <a:schemeClr val="tx1"/>
                 </a:solidFill>
@@ -8437,7 +8495,7 @@
               <a:t>Download:</a:t>
             </a:r>
             <a:r>
-              <a:rPr sz="2200" b="0" i="0" u="none">
+              <a:rPr sz="2000" b="0" i="0" u="none">
                 <a:solidFill>
                   <a:schemeClr val="tx1"/>
                 </a:solidFill>
@@ -8448,7 +8506,7 @@
               <a:t> </a:t>
             </a:r>
             <a:r>
-              <a:rPr sz="2200" b="0" i="0" u="sng">
+              <a:rPr sz="2000" b="0" i="0" u="sng">
                 <a:solidFill>
                   <a:schemeClr val="tx1"/>
                 </a:solidFill>
@@ -8460,7 +8518,7 @@
               <a:t>arXiv HTML</a:t>
             </a:r>
             <a:r>
-              <a:rPr sz="2200" b="0" i="0" u="none">
+              <a:rPr sz="2000" b="0" i="0" u="none">
                 <a:solidFill>
                   <a:schemeClr val="tx1"/>
                 </a:solidFill>
@@ -8471,7 +8529,7 @@
               <a:t> · </a:t>
             </a:r>
             <a:r>
-              <a:rPr sz="2200" b="0" i="0" u="sng">
+              <a:rPr sz="2000" b="0" i="0" u="sng">
                 <a:solidFill>
                   <a:schemeClr val="tx1"/>
                 </a:solidFill>
@@ -8483,7 +8541,7 @@
               <a:t>arXiv PDF</a:t>
             </a:r>
             <a:r>
-              <a:rPr sz="2200" b="0" i="0" u="none">
+              <a:rPr sz="2000" b="0" i="0" u="none">
                 <a:solidFill>
                   <a:schemeClr val="tx1"/>
                 </a:solidFill>
@@ -8494,7 +8552,7 @@
               <a:t> · </a:t>
             </a:r>
             <a:r>
-              <a:rPr sz="2200" b="0" i="0" u="sng">
+              <a:rPr sz="2000" b="0" i="0" u="sng">
                 <a:solidFill>
                   <a:schemeClr val="tx1"/>
                 </a:solidFill>
@@ -8505,7 +8563,7 @@
               </a:rPr>
               <a:t>Springer chapter (paywalled)</a:t>
             </a:r>
-            <a:endParaRPr sz="4800">
+            <a:endParaRPr sz="3600">
               <a:solidFill>
                 <a:schemeClr val="tx1"/>
               </a:solidFill>
@@ -8515,6 +8573,32 @@
           </a:p>
         </p:txBody>
       </p:sp>
+      <p:pic>
+        <p:nvPicPr>
+          <p:cNvPr id="2054062206" name="Google Shape;130;p13"/>
+          <p:cNvPicPr/>
+          <p:nvPr/>
+        </p:nvPicPr>
+        <p:blipFill rotWithShape="1">
+          <a:blip r:embed="rId6">
+            <a:alphaModFix/>
+          </a:blip>
+          <a:stretch/>
+        </p:blipFill>
+        <p:spPr bwMode="auto">
+          <a:xfrm>
+            <a:off x="10163432" y="476672"/>
+            <a:ext cx="1135965" cy="739033"/>
+          </a:xfrm>
+          <a:prstGeom prst="rect">
+            <a:avLst/>
+          </a:prstGeom>
+          <a:noFill/>
+          <a:ln>
+            <a:noFill/>
+          </a:ln>
+        </p:spPr>
+      </p:pic>
     </p:spTree>
   </p:cSld>
   <p:clrMapOvr>
@@ -8550,7 +8634,7 @@
       </p:grpSpPr>
       <p:sp>
         <p:nvSpPr>
-          <p:cNvPr id="426277066" name="Slide Number Placeholder 3"/>
+          <p:cNvPr id="1973542486" name="Slide Number Placeholder 3"/>
           <p:cNvSpPr>
             <a:spLocks noGrp="1"/>
           </p:cNvSpPr>
@@ -8583,14 +8667,14 @@
       </p:sp>
       <p:sp>
         <p:nvSpPr>
-          <p:cNvPr id="179363315" name=""/>
+          <p:cNvPr id="1324397577" name=""/>
           <p:cNvSpPr txBox="1"/>
           <p:nvPr/>
         </p:nvSpPr>
         <p:spPr bwMode="auto">
           <a:xfrm rot="0" flipH="0" flipV="0">
-            <a:off x="1382342" y="535781"/>
-            <a:ext cx="9732750" cy="5852520"/>
+            <a:off x="1382341" y="1131093"/>
+            <a:ext cx="9733469" cy="4419959"/>
           </a:xfrm>
           <a:prstGeom prst="rect">
             <a:avLst/>
@@ -8606,9 +8690,11 @@
               <a:defRPr/>
             </a:pPr>
             <a:r>
-              <a:rPr sz="2400" b="1" i="0" u="none">
-                <a:solidFill>
-                  <a:schemeClr val="tx1"/>
+              <a:rPr sz="2200" b="1" i="0" u="none">
+                <a:solidFill>
+                  <a:schemeClr val="accent1">
+                    <a:lumMod val="50000"/>
+                  </a:schemeClr>
                 </a:solidFill>
                 <a:latin typeface="Times New Roman"/>
                 <a:ea typeface="Times New Roman"/>
@@ -8616,7 +8702,7 @@
               </a:rPr>
               <a:t>4. Automated Multimodal Severity Assessment of Diabetic Retinopathy Using Ultra-Widefield Color Fundus Photography and Clinical Tabular Data</a:t>
             </a:r>
-            <a:endParaRPr sz="2400">
+            <a:endParaRPr sz="2200">
               <a:solidFill>
                 <a:schemeClr val="tx1"/>
               </a:solidFill>
@@ -8629,7 +8715,7 @@
               <a:defRPr/>
             </a:pPr>
             <a:r>
-              <a:rPr sz="1800" b="0" i="1" u="none">
+              <a:rPr sz="1600" b="0" i="1" u="none">
                 <a:solidFill>
                   <a:schemeClr val="tx1"/>
                 </a:solidFill>
@@ -8639,7 +8725,7 @@
               </a:rPr>
               <a:t>Rezaei et al., Biomedical Signal Processing and Control (Elsevier), 2025, open access</a:t>
             </a:r>
-            <a:endParaRPr sz="2400">
+            <a:endParaRPr sz="2200">
               <a:solidFill>
                 <a:schemeClr val="tx1"/>
               </a:solidFill>
@@ -8654,7 +8740,7 @@
               <a:defRPr/>
             </a:pPr>
             <a:r>
-              <a:rPr sz="1800" b="1" i="0" u="none">
+              <a:rPr sz="1600" b="1" i="0" u="none">
                 <a:solidFill>
                   <a:schemeClr val="tx1"/>
                 </a:solidFill>
@@ -8665,7 +8751,7 @@
               <a:t>Methodology:</a:t>
             </a:r>
             <a:r>
-              <a:rPr sz="1800" b="0" i="0" u="none">
+              <a:rPr sz="1600" b="0" i="0" u="none">
                 <a:solidFill>
                   <a:schemeClr val="tx1"/>
                 </a:solidFill>
@@ -8675,7 +8761,7 @@
               </a:rPr>
               <a:t> A multimodal deep learning framework that combines 2D UWF color fundus photos with 76 clinical tabular features (demographic, biochemical and clinical parameters) to classify DR severity stages. It uses a patient-level data split, so images from the same patient never end up in both train and test.</a:t>
             </a:r>
-            <a:endParaRPr sz="2400">
+            <a:endParaRPr sz="2200">
               <a:solidFill>
                 <a:schemeClr val="tx1"/>
               </a:solidFill>
@@ -8690,7 +8776,7 @@
               <a:defRPr/>
             </a:pPr>
             <a:r>
-              <a:rPr sz="1800" b="1" i="0" u="none">
+              <a:rPr sz="1600" b="1" i="0" u="none">
                 <a:solidFill>
                   <a:schemeClr val="tx1"/>
                 </a:solidFill>
@@ -8701,7 +8787,7 @@
               <a:t>Dataset:</a:t>
             </a:r>
             <a:r>
-              <a:rPr sz="1800" b="0" i="0" u="none">
+              <a:rPr sz="1600" b="0" i="0" u="none">
                 <a:solidFill>
                   <a:schemeClr val="tx1"/>
                 </a:solidFill>
@@ -8711,7 +8797,7 @@
               </a:rPr>
               <a:t> UWF-CFP images from the CLARUS 500 device (Carl Zeiss Meditec), with clinical data from the EVIRED project. External validation used two public Brazilian datasets, BRSET and mBRSET.</a:t>
             </a:r>
-            <a:endParaRPr sz="2400">
+            <a:endParaRPr sz="2200">
               <a:solidFill>
                 <a:schemeClr val="tx1"/>
               </a:solidFill>
@@ -8726,7 +8812,7 @@
               <a:defRPr/>
             </a:pPr>
             <a:r>
-              <a:rPr sz="1800" b="1" i="0" u="none">
+              <a:rPr sz="1600" b="1" i="0" u="none">
                 <a:solidFill>
                   <a:schemeClr val="tx1"/>
                 </a:solidFill>
@@ -8737,7 +8823,7 @@
               <a:t>Advantages:</a:t>
             </a:r>
             <a:r>
-              <a:rPr sz="1800" b="0" i="0" u="none">
+              <a:rPr sz="1600" b="0" i="0" u="none">
                 <a:solidFill>
                   <a:schemeClr val="tx1"/>
                 </a:solidFill>
@@ -8747,7 +8833,7 @@
               </a:rPr>
               <a:t> The fusion model beat models using imaging alone or clinical data alone. It generalized to the two external datasets, and the patient-level split avoids inflated scores.</a:t>
             </a:r>
-            <a:endParaRPr sz="2400">
+            <a:endParaRPr sz="2200">
               <a:solidFill>
                 <a:schemeClr val="tx1"/>
               </a:solidFill>
@@ -8762,7 +8848,7 @@
               <a:defRPr/>
             </a:pPr>
             <a:r>
-              <a:rPr sz="1800" b="1" i="0" u="none">
+              <a:rPr sz="1600" b="1" i="0" u="none">
                 <a:solidFill>
                   <a:schemeClr val="tx1"/>
                 </a:solidFill>
@@ -8773,7 +8859,7 @@
               <a:t>Limitations:</a:t>
             </a:r>
             <a:r>
-              <a:rPr sz="1800" b="0" i="0" u="none">
+              <a:rPr sz="1600" b="0" i="0" u="none">
                 <a:solidFill>
                   <a:schemeClr val="tx1"/>
                 </a:solidFill>
@@ -8783,7 +8869,7 @@
               </a:rPr>
               <a:t> The gain is small (+2.1% accuracy over image-only) and the absolute multiclass accuracy is only 63.4%. It grades DR severity only, with no DME. The EVIRED data is private, and the model needs clinical tabular data to be available at screening time.</a:t>
             </a:r>
-            <a:endParaRPr sz="2400">
+            <a:endParaRPr sz="2200">
               <a:solidFill>
                 <a:schemeClr val="tx1"/>
               </a:solidFill>
@@ -8798,7 +8884,7 @@
               <a:defRPr/>
             </a:pPr>
             <a:r>
-              <a:rPr sz="1800" b="1" i="0" u="none">
+              <a:rPr sz="1600" b="1" i="0" u="none">
                 <a:solidFill>
                   <a:schemeClr val="tx1"/>
                 </a:solidFill>
@@ -8809,7 +8895,7 @@
               <a:t>Results:</a:t>
             </a:r>
             <a:r>
-              <a:rPr sz="1800" b="0" i="0" u="none">
+              <a:rPr sz="1600" b="0" i="0" u="none">
                 <a:solidFill>
                   <a:schemeClr val="tx1"/>
                 </a:solidFill>
@@ -8819,7 +8905,7 @@
               </a:rPr>
               <a:t> Multiclass accuracy of 63.4% and kappa of 0.807, which is 2.1% higher accuracy and 0.022 higher kappa than the image-only classifier. On the external datasets, kappa improved by 0.065 (BRSET) and 0.048 (mBRSET) over image-only.</a:t>
             </a:r>
-            <a:endParaRPr sz="2400">
+            <a:endParaRPr sz="2200">
               <a:solidFill>
                 <a:schemeClr val="tx1"/>
               </a:solidFill>
@@ -8834,7 +8920,7 @@
               <a:defRPr/>
             </a:pPr>
             <a:r>
-              <a:rPr sz="1800" b="1" i="0" u="none">
+              <a:rPr sz="1600" b="1" i="0" u="none">
                 <a:solidFill>
                   <a:schemeClr val="tx1"/>
                 </a:solidFill>
@@ -8845,7 +8931,7 @@
               <a:t>Download:</a:t>
             </a:r>
             <a:r>
-              <a:rPr sz="1800" b="0" i="0" u="none">
+              <a:rPr sz="1600" b="0" i="0" u="none">
                 <a:solidFill>
                   <a:schemeClr val="tx1"/>
                 </a:solidFill>
@@ -8856,7 +8942,7 @@
               <a:t> </a:t>
             </a:r>
             <a:r>
-              <a:rPr sz="1800" b="0" i="0" u="sng">
+              <a:rPr sz="1600" b="0" i="0" u="sng">
                 <a:solidFill>
                   <a:schemeClr val="tx1"/>
                 </a:solidFill>
@@ -8868,7 +8954,7 @@
               <a:t>ScienceDirect (open access)</a:t>
             </a:r>
             <a:r>
-              <a:rPr sz="1800" b="0" i="0" u="none">
+              <a:rPr sz="1600" b="0" i="0" u="none">
                 <a:solidFill>
                   <a:schemeClr val="tx1"/>
                 </a:solidFill>
@@ -8879,7 +8965,7 @@
               <a:t> · </a:t>
             </a:r>
             <a:r>
-              <a:rPr sz="1800" b="0" i="0" u="sng">
+              <a:rPr sz="1600" b="0" i="0" u="sng">
                 <a:solidFill>
                   <a:schemeClr val="tx1"/>
                 </a:solidFill>
@@ -8890,7 +8976,7 @@
               </a:rPr>
               <a:t>DOI: 10.1016/j.bspc.2025.108673</a:t>
             </a:r>
-            <a:endParaRPr sz="2400">
+            <a:endParaRPr sz="2200">
               <a:solidFill>
                 <a:schemeClr val="tx1"/>
               </a:solidFill>
@@ -8900,6 +8986,32 @@
           </a:p>
         </p:txBody>
       </p:sp>
+      <p:pic>
+        <p:nvPicPr>
+          <p:cNvPr id="1309790533" name="Google Shape;130;p13"/>
+          <p:cNvPicPr/>
+          <p:nvPr/>
+        </p:nvPicPr>
+        <p:blipFill rotWithShape="1">
+          <a:blip r:embed="rId5">
+            <a:alphaModFix/>
+          </a:blip>
+          <a:stretch/>
+        </p:blipFill>
+        <p:spPr bwMode="auto">
+          <a:xfrm>
+            <a:off x="10163432" y="476672"/>
+            <a:ext cx="1135965" cy="739033"/>
+          </a:xfrm>
+          <a:prstGeom prst="rect">
+            <a:avLst/>
+          </a:prstGeom>
+          <a:noFill/>
+          <a:ln>
+            <a:noFill/>
+          </a:ln>
+        </p:spPr>
+      </p:pic>
     </p:spTree>
   </p:cSld>
   <p:clrMapOvr>
@@ -8935,7 +9047,7 @@
       </p:grpSpPr>
       <p:sp>
         <p:nvSpPr>
-          <p:cNvPr id="1156903085" name="Slide Number Placeholder 3"/>
+          <p:cNvPr id="1897872558" name="Slide Number Placeholder 3"/>
           <p:cNvSpPr>
             <a:spLocks noGrp="1"/>
           </p:cNvSpPr>
@@ -8968,14 +9080,14 @@
       </p:sp>
       <p:sp>
         <p:nvSpPr>
-          <p:cNvPr id="468096796" name=""/>
+          <p:cNvPr id="1060258031" name=""/>
           <p:cNvSpPr txBox="1"/>
           <p:nvPr/>
         </p:nvSpPr>
         <p:spPr bwMode="auto">
           <a:xfrm rot="0" flipH="0" flipV="0">
-            <a:off x="1382342" y="714375"/>
-            <a:ext cx="9732750" cy="5303879"/>
+            <a:off x="1382341" y="1131093"/>
+            <a:ext cx="9733829" cy="4541879"/>
           </a:xfrm>
           <a:prstGeom prst="rect">
             <a:avLst/>
@@ -8991,9 +9103,11 @@
               <a:defRPr/>
             </a:pPr>
             <a:r>
-              <a:rPr sz="2800" b="1" i="0" u="none">
-                <a:solidFill>
-                  <a:schemeClr val="tx1"/>
+              <a:rPr sz="2600" b="1" i="0" u="none">
+                <a:solidFill>
+                  <a:schemeClr val="accent1">
+                    <a:lumMod val="50000"/>
+                  </a:schemeClr>
                 </a:solidFill>
                 <a:latin typeface="Times New Roman"/>
                 <a:ea typeface="Times New Roman"/>
@@ -9001,7 +9115,7 @@
               </a:rPr>
               <a:t>5. Many-MobileNet: Multi-Model Augmentation for Robust Retinal Disease Classification</a:t>
             </a:r>
-            <a:endParaRPr sz="2800">
+            <a:endParaRPr sz="2600">
               <a:solidFill>
                 <a:schemeClr val="tx1"/>
               </a:solidFill>
@@ -9014,7 +9128,7 @@
               <a:defRPr/>
             </a:pPr>
             <a:r>
-              <a:rPr sz="2200" b="0" i="1" u="none">
+              <a:rPr sz="2000" b="0" i="1" u="none">
                 <a:solidFill>
                   <a:schemeClr val="tx1"/>
                 </a:solidFill>
@@ -9024,7 +9138,7 @@
               </a:rPr>
               <a:t>Wang et al., Dec 2024, arXiv</a:t>
             </a:r>
-            <a:endParaRPr sz="2800">
+            <a:endParaRPr sz="2600">
               <a:solidFill>
                 <a:schemeClr val="tx1"/>
               </a:solidFill>
@@ -9039,7 +9153,7 @@
               <a:defRPr/>
             </a:pPr>
             <a:r>
-              <a:rPr sz="2200" b="1" i="0" u="none">
+              <a:rPr sz="2000" b="1" i="0" u="none">
                 <a:solidFill>
                   <a:schemeClr val="tx1"/>
                 </a:solidFill>
@@ -9050,7 +9164,7 @@
               <a:t>Methodology:</a:t>
             </a:r>
             <a:r>
-              <a:rPr sz="2200" b="0" i="0" u="none">
+              <a:rPr sz="2000" b="0" i="0" u="none">
                 <a:solidFill>
                   <a:schemeClr val="tx1"/>
                 </a:solidFill>
@@ -9060,7 +9174,7 @@
               </a:rPr>
               <a:t> Fuses three nnMobileNet models (two lightweight, one medium) with squeeze-and-excitation blocks. Each is trained with different augmentation, and predictions are combined by voting.</a:t>
             </a:r>
-            <a:endParaRPr sz="2800">
+            <a:endParaRPr sz="2600">
               <a:solidFill>
                 <a:schemeClr val="tx1"/>
               </a:solidFill>
@@ -9075,7 +9189,7 @@
               <a:defRPr/>
             </a:pPr>
             <a:r>
-              <a:rPr sz="2200" b="1" i="0" u="none">
+              <a:rPr sz="2000" b="1" i="0" u="none">
                 <a:solidFill>
                   <a:schemeClr val="tx1"/>
                 </a:solidFill>
@@ -9086,7 +9200,7 @@
               <a:t>Dataset:</a:t>
             </a:r>
             <a:r>
-              <a:rPr sz="2200" b="0" i="0" u="none">
+              <a:rPr sz="2000" b="0" i="0" u="none">
                 <a:solidFill>
                   <a:schemeClr val="tx1"/>
                 </a:solidFill>
@@ -9096,7 +9210,7 @@
               </a:rPr>
               <a:t> UWF4DR quality-assessment task, 434 images (205 ungradable, 229 gradable).</a:t>
             </a:r>
-            <a:endParaRPr sz="2800">
+            <a:endParaRPr sz="2600">
               <a:solidFill>
                 <a:schemeClr val="tx1"/>
               </a:solidFill>
@@ -9111,7 +9225,7 @@
               <a:defRPr/>
             </a:pPr>
             <a:r>
-              <a:rPr sz="2200" b="1" i="0" u="none">
+              <a:rPr sz="2000" b="1" i="0" u="none">
                 <a:solidFill>
                   <a:schemeClr val="tx1"/>
                 </a:solidFill>
@@ -9122,7 +9236,7 @@
               <a:t>Advantages:</a:t>
             </a:r>
             <a:r>
-              <a:rPr sz="2200" b="0" i="0" u="none">
+              <a:rPr sz="2000" b="0" i="0" u="none">
                 <a:solidFill>
                   <a:schemeClr val="tx1"/>
                 </a:solidFill>
@@ -9132,7 +9246,7 @@
               </a:rPr>
               <a:t> Efficient and robust on small data, and quality gating is the first step of a UWF screening pipeline.</a:t>
             </a:r>
-            <a:endParaRPr sz="2800">
+            <a:endParaRPr sz="2600">
               <a:solidFill>
                 <a:schemeClr val="tx1"/>
               </a:solidFill>
@@ -9147,7 +9261,7 @@
               <a:defRPr/>
             </a:pPr>
             <a:r>
-              <a:rPr sz="2200" b="1" i="0" u="none">
+              <a:rPr sz="2000" b="1" i="0" u="none">
                 <a:solidFill>
                   <a:schemeClr val="tx1"/>
                 </a:solidFill>
@@ -9158,7 +9272,7 @@
               <a:t>Limitations:</a:t>
             </a:r>
             <a:r>
-              <a:rPr sz="2200" b="0" i="0" u="none">
+              <a:rPr sz="2000" b="0" i="0" u="none">
                 <a:solidFill>
                   <a:schemeClr val="tx1"/>
                 </a:solidFill>
@@ -9168,7 +9282,7 @@
               </a:rPr>
               <a:t> Covers image quality only, not DR or DME. Fusion slows inference and didn't help on the validation set.</a:t>
             </a:r>
-            <a:endParaRPr sz="2800">
+            <a:endParaRPr sz="2600">
               <a:solidFill>
                 <a:schemeClr val="tx1"/>
               </a:solidFill>
@@ -9183,7 +9297,7 @@
               <a:defRPr/>
             </a:pPr>
             <a:r>
-              <a:rPr sz="2200" b="1" i="0" u="none">
+              <a:rPr sz="2000" b="1" i="0" u="none">
                 <a:solidFill>
                   <a:schemeClr val="tx1"/>
                 </a:solidFill>
@@ -9194,7 +9308,7 @@
               <a:t>Results:</a:t>
             </a:r>
             <a:r>
-              <a:rPr sz="2200" b="0" i="0" u="none">
+              <a:rPr sz="2000" b="0" i="0" u="none">
                 <a:solidFill>
                   <a:schemeClr val="tx1"/>
                 </a:solidFill>
@@ -9204,7 +9318,7 @@
               </a:rPr>
               <a:t> 3rd place in the challenge with AUROC 0.9525, AUPRC 0.9683, sensitivity 0.8983 and specificity 0.925.</a:t>
             </a:r>
-            <a:endParaRPr sz="2800">
+            <a:endParaRPr sz="2600">
               <a:solidFill>
                 <a:schemeClr val="tx1"/>
               </a:solidFill>
@@ -9219,7 +9333,7 @@
               <a:defRPr/>
             </a:pPr>
             <a:r>
-              <a:rPr sz="2200" b="1" i="0" u="none">
+              <a:rPr sz="2000" b="1" i="0" u="none">
                 <a:solidFill>
                   <a:schemeClr val="tx1"/>
                 </a:solidFill>
@@ -9230,7 +9344,7 @@
               <a:t>Download:</a:t>
             </a:r>
             <a:r>
-              <a:rPr sz="2200" b="0" i="0" u="none">
+              <a:rPr sz="2000" b="0" i="0" u="none">
                 <a:solidFill>
                   <a:schemeClr val="tx1"/>
                 </a:solidFill>
@@ -9241,7 +9355,7 @@
               <a:t> </a:t>
             </a:r>
             <a:r>
-              <a:rPr sz="2200" b="0" i="0" u="sng">
+              <a:rPr sz="2000" b="0" i="0" u="sng">
                 <a:solidFill>
                   <a:schemeClr val="tx1"/>
                 </a:solidFill>
@@ -9253,7 +9367,7 @@
               <a:t>arXiv PDF</a:t>
             </a:r>
             <a:r>
-              <a:rPr sz="2200" b="0" i="0" u="none">
+              <a:rPr sz="2000" b="0" i="0" u="none">
                 <a:solidFill>
                   <a:schemeClr val="tx1"/>
                 </a:solidFill>
@@ -9264,7 +9378,7 @@
               <a:t> · </a:t>
             </a:r>
             <a:r>
-              <a:rPr sz="2200" b="0" i="0" u="sng">
+              <a:rPr sz="2000" b="0" i="0" u="sng">
                 <a:solidFill>
                   <a:schemeClr val="tx1"/>
                 </a:solidFill>
@@ -9276,7 +9390,7 @@
               <a:t>Abstract page</a:t>
             </a:r>
             <a:r>
-              <a:rPr sz="2200" b="0" i="0" u="none">
+              <a:rPr sz="2000" b="0" i="0" u="none">
                 <a:solidFill>
                   <a:schemeClr val="tx1"/>
                 </a:solidFill>
@@ -9287,7 +9401,7 @@
               <a:t> · </a:t>
             </a:r>
             <a:r>
-              <a:rPr sz="2200" b="0" i="0" u="sng">
+              <a:rPr sz="2000" b="0" i="0" u="sng">
                 <a:solidFill>
                   <a:schemeClr val="tx1"/>
                 </a:solidFill>
@@ -9298,7 +9412,7 @@
               </a:rPr>
               <a:t>Code</a:t>
             </a:r>
-            <a:endParaRPr sz="2800">
+            <a:endParaRPr sz="2600">
               <a:solidFill>
                 <a:schemeClr val="tx1"/>
               </a:solidFill>
@@ -9308,6 +9422,32 @@
           </a:p>
         </p:txBody>
       </p:sp>
+      <p:pic>
+        <p:nvPicPr>
+          <p:cNvPr id="1022036998" name="Google Shape;130;p13"/>
+          <p:cNvPicPr/>
+          <p:nvPr/>
+        </p:nvPicPr>
+        <p:blipFill rotWithShape="1">
+          <a:blip r:embed="rId6">
+            <a:alphaModFix/>
+          </a:blip>
+          <a:stretch/>
+        </p:blipFill>
+        <p:spPr bwMode="auto">
+          <a:xfrm>
+            <a:off x="10163432" y="476672"/>
+            <a:ext cx="1135965" cy="739033"/>
+          </a:xfrm>
+          <a:prstGeom prst="rect">
+            <a:avLst/>
+          </a:prstGeom>
+          <a:noFill/>
+          <a:ln>
+            <a:noFill/>
+          </a:ln>
+        </p:spPr>
+      </p:pic>
     </p:spTree>
   </p:cSld>
   <p:clrMapOvr>
